--- a/project_farm_doe_analogy.pptx
+++ b/project_farm_doe_analogy.pptx
@@ -3081,6 +3081,14 @@
 <file path=ppt/slides/slide1.xml><?xml version="1.0" encoding="utf-8"?>
 <p:sld xmlns:a="http://schemas.openxmlformats.org/drawingml/2006/main" xmlns:p="http://schemas.openxmlformats.org/presentationml/2006/main" xmlns:r="http://schemas.openxmlformats.org/officeDocument/2006/relationships">
   <p:cSld>
+    <p:bg>
+      <p:bgPr>
+        <a:solidFill>
+          <a:srgbClr val="FFFFFF"/>
+        </a:solidFill>
+        <a:effectLst/>
+      </p:bgPr>
+    </p:bg>
     <p:spTree>
       <p:nvGrpSpPr>
         <p:cNvPr id="1" name=""/>
@@ -3088,9 +3096,484 @@
         <p:nvPr/>
       </p:nvGrpSpPr>
       <p:grpSpPr/>
+      <p:sp>
+        <p:nvSpPr>
+          <p:cNvPr id="2" name="Rectangle 1"/>
+          <p:cNvSpPr/>
+          <p:nvPr/>
+        </p:nvSpPr>
+        <p:spPr>
+          <a:xfrm>
+            <a:off x="0" y="0"/>
+            <a:ext cx="12191695" cy="804672"/>
+          </a:xfrm>
+          <a:prstGeom prst="rect">
+            <a:avLst/>
+          </a:prstGeom>
+          <a:solidFill>
+            <a:srgbClr val="153964"/>
+          </a:solidFill>
+          <a:ln>
+            <a:solidFill>
+              <a:srgbClr val="153964"/>
+            </a:solidFill>
+          </a:ln>
+        </p:spPr>
+        <p:style>
+          <a:lnRef idx="1">
+            <a:schemeClr val="accent1"/>
+          </a:lnRef>
+          <a:fillRef idx="3">
+            <a:schemeClr val="accent1"/>
+          </a:fillRef>
+          <a:effectRef idx="2">
+            <a:schemeClr val="accent1"/>
+          </a:effectRef>
+          <a:fontRef idx="minor">
+            <a:schemeClr val="lt1"/>
+          </a:fontRef>
+        </p:style>
+        <p:txBody>
+          <a:bodyPr rtlCol="0" anchor="ctr"/>
+          <a:lstStyle/>
+          <a:p>
+            <a:pPr algn="ctr"/>
+          </a:p>
+        </p:txBody>
+      </p:sp>
+      <p:sp>
+        <p:nvSpPr>
+          <p:cNvPr id="3" name="TextBox 2"/>
+          <p:cNvSpPr txBox="1"/>
+          <p:nvPr/>
+        </p:nvSpPr>
+        <p:spPr>
+          <a:xfrm>
+            <a:off x="320040" y="73152"/>
+            <a:ext cx="11548872" cy="384048"/>
+          </a:xfrm>
+          <a:prstGeom prst="rect">
+            <a:avLst/>
+          </a:prstGeom>
+          <a:noFill/>
+        </p:spPr>
+        <p:txBody>
+          <a:bodyPr wrap="square" lIns="45720" rIns="45720" tIns="18288" bIns="18288" anchor="ctr">
+            <a:spAutoFit/>
+          </a:bodyPr>
+          <a:lstStyle/>
+          <a:p>
+            <a:pPr algn="ctr">
+              <a:spcAft>
+                <a:spcPts val="0"/>
+              </a:spcAft>
+            </a:pPr>
+            <a:r>
+              <a:rPr sz="2500" b="1" i="0">
+                <a:solidFill>
+                  <a:srgbClr val="FFFFFF"/>
+                </a:solidFill>
+                <a:latin typeface="Aptos"/>
+              </a:rPr>
+              <a:t>YouTube “Project Farm” ≈ Design of Experiments (DoE)</a:t>
+            </a:r>
+          </a:p>
+        </p:txBody>
+      </p:sp>
+      <p:sp>
+        <p:nvSpPr>
+          <p:cNvPr id="4" name="TextBox 3"/>
+          <p:cNvSpPr txBox="1"/>
+          <p:nvPr/>
+        </p:nvSpPr>
+        <p:spPr>
+          <a:xfrm>
+            <a:off x="320040" y="438912"/>
+            <a:ext cx="11548872" cy="246888"/>
+          </a:xfrm>
+          <a:prstGeom prst="rect">
+            <a:avLst/>
+          </a:prstGeom>
+          <a:noFill/>
+        </p:spPr>
+        <p:txBody>
+          <a:bodyPr wrap="square" lIns="45720" rIns="45720" tIns="18288" bIns="18288" anchor="ctr">
+            <a:spAutoFit/>
+          </a:bodyPr>
+          <a:lstStyle/>
+          <a:p>
+            <a:pPr algn="ctr">
+              <a:spcAft>
+                <a:spcPts val="0"/>
+              </a:spcAft>
+            </a:pPr>
+            <a:r>
+              <a:rPr sz="1300" b="0" i="1">
+                <a:solidFill>
+                  <a:srgbClr val="FFFFFF"/>
+                </a:solidFill>
+                <a:latin typeface="Aptos"/>
+              </a:rPr>
+              <a:t>Same goal. Same approach. Different domain.</a:t>
+            </a:r>
+          </a:p>
+        </p:txBody>
+      </p:sp>
+      <p:sp>
+        <p:nvSpPr>
+          <p:cNvPr id="5" name="Rounded Rectangle 4"/>
+          <p:cNvSpPr/>
+          <p:nvPr/>
+        </p:nvSpPr>
+        <p:spPr>
+          <a:xfrm>
+            <a:off x="164592" y="877824"/>
+            <a:ext cx="11859768" cy="512064"/>
+          </a:xfrm>
+          <a:prstGeom prst="roundRect">
+            <a:avLst>
+              <a:gd name="adj" fmla="val 8000"/>
+            </a:avLst>
+          </a:prstGeom>
+          <a:solidFill>
+            <a:srgbClr val="E7F3FB"/>
+          </a:solidFill>
+          <a:ln>
+            <a:solidFill>
+              <a:srgbClr val="E7F3FB"/>
+            </a:solidFill>
+          </a:ln>
+        </p:spPr>
+        <p:style>
+          <a:lnRef idx="1">
+            <a:schemeClr val="accent1"/>
+          </a:lnRef>
+          <a:fillRef idx="3">
+            <a:schemeClr val="accent1"/>
+          </a:fillRef>
+          <a:effectRef idx="2">
+            <a:schemeClr val="accent1"/>
+          </a:effectRef>
+          <a:fontRef idx="minor">
+            <a:schemeClr val="lt1"/>
+          </a:fontRef>
+        </p:style>
+        <p:txBody>
+          <a:bodyPr rtlCol="0" anchor="ctr"/>
+          <a:lstStyle/>
+          <a:p>
+            <a:pPr algn="ctr"/>
+          </a:p>
+        </p:txBody>
+      </p:sp>
+      <p:sp>
+        <p:nvSpPr>
+          <p:cNvPr id="6" name="TextBox 5"/>
+          <p:cNvSpPr txBox="1"/>
+          <p:nvPr/>
+        </p:nvSpPr>
+        <p:spPr>
+          <a:xfrm>
+            <a:off x="320040" y="914400"/>
+            <a:ext cx="11548872" cy="420624"/>
+          </a:xfrm>
+          <a:prstGeom prst="rect">
+            <a:avLst/>
+          </a:prstGeom>
+          <a:noFill/>
+        </p:spPr>
+        <p:txBody>
+          <a:bodyPr wrap="square" lIns="45720" rIns="45720" tIns="18288" bIns="18288" anchor="ctr">
+            <a:spAutoFit/>
+          </a:bodyPr>
+          <a:lstStyle/>
+          <a:p>
+            <a:pPr algn="ctr">
+              <a:spcAft>
+                <a:spcPts val="0"/>
+              </a:spcAft>
+            </a:pPr>
+            <a:r>
+              <a:rPr sz="1300" b="1" i="0">
+                <a:solidFill>
+                  <a:srgbClr val="153964"/>
+                </a:solidFill>
+                <a:latin typeface="Aptos"/>
+              </a:rPr>
+              <a:t>Project Farm compares real-world products through structured, repeatable tests. DoE applies the same logic with a formal statistical framework.</a:t>
+            </a:r>
+          </a:p>
+        </p:txBody>
+      </p:sp>
+      <p:sp>
+        <p:nvSpPr>
+          <p:cNvPr id="7" name="Rounded Rectangle 6"/>
+          <p:cNvSpPr/>
+          <p:nvPr/>
+        </p:nvSpPr>
+        <p:spPr>
+          <a:xfrm>
+            <a:off x="164592" y="1517904"/>
+            <a:ext cx="3886200" cy="4480560"/>
+          </a:xfrm>
+          <a:prstGeom prst="roundRect">
+            <a:avLst>
+              <a:gd name="adj" fmla="val 8000"/>
+            </a:avLst>
+          </a:prstGeom>
+          <a:solidFill>
+            <a:srgbClr val="F4F9FC"/>
+          </a:solidFill>
+          <a:ln>
+            <a:solidFill>
+              <a:srgbClr val="C7DBEA"/>
+            </a:solidFill>
+          </a:ln>
+        </p:spPr>
+        <p:style>
+          <a:lnRef idx="1">
+            <a:schemeClr val="accent1"/>
+          </a:lnRef>
+          <a:fillRef idx="3">
+            <a:schemeClr val="accent1"/>
+          </a:fillRef>
+          <a:effectRef idx="2">
+            <a:schemeClr val="accent1"/>
+          </a:effectRef>
+          <a:fontRef idx="minor">
+            <a:schemeClr val="lt1"/>
+          </a:fontRef>
+        </p:style>
+        <p:txBody>
+          <a:bodyPr rtlCol="0" anchor="ctr"/>
+          <a:lstStyle/>
+          <a:p>
+            <a:pPr algn="ctr"/>
+          </a:p>
+        </p:txBody>
+      </p:sp>
+      <p:sp>
+        <p:nvSpPr>
+          <p:cNvPr id="8" name="Rounded Rectangle 7"/>
+          <p:cNvSpPr/>
+          <p:nvPr/>
+        </p:nvSpPr>
+        <p:spPr>
+          <a:xfrm>
+            <a:off x="4160520" y="1517904"/>
+            <a:ext cx="3886200" cy="4480560"/>
+          </a:xfrm>
+          <a:prstGeom prst="roundRect">
+            <a:avLst>
+              <a:gd name="adj" fmla="val 8000"/>
+            </a:avLst>
+          </a:prstGeom>
+          <a:solidFill>
+            <a:srgbClr val="F4F9FC"/>
+          </a:solidFill>
+          <a:ln>
+            <a:solidFill>
+              <a:srgbClr val="C7DBEA"/>
+            </a:solidFill>
+          </a:ln>
+        </p:spPr>
+        <p:style>
+          <a:lnRef idx="1">
+            <a:schemeClr val="accent1"/>
+          </a:lnRef>
+          <a:fillRef idx="3">
+            <a:schemeClr val="accent1"/>
+          </a:fillRef>
+          <a:effectRef idx="2">
+            <a:schemeClr val="accent1"/>
+          </a:effectRef>
+          <a:fontRef idx="minor">
+            <a:schemeClr val="lt1"/>
+          </a:fontRef>
+        </p:style>
+        <p:txBody>
+          <a:bodyPr rtlCol="0" anchor="ctr"/>
+          <a:lstStyle/>
+          <a:p>
+            <a:pPr algn="ctr"/>
+          </a:p>
+        </p:txBody>
+      </p:sp>
+      <p:sp>
+        <p:nvSpPr>
+          <p:cNvPr id="9" name="Rounded Rectangle 8"/>
+          <p:cNvSpPr/>
+          <p:nvPr/>
+        </p:nvSpPr>
+        <p:spPr>
+          <a:xfrm>
+            <a:off x="8129016" y="1517904"/>
+            <a:ext cx="3886200" cy="4480560"/>
+          </a:xfrm>
+          <a:prstGeom prst="roundRect">
+            <a:avLst>
+              <a:gd name="adj" fmla="val 8000"/>
+            </a:avLst>
+          </a:prstGeom>
+          <a:solidFill>
+            <a:srgbClr val="F4F9FC"/>
+          </a:solidFill>
+          <a:ln>
+            <a:solidFill>
+              <a:srgbClr val="C7DBEA"/>
+            </a:solidFill>
+          </a:ln>
+        </p:spPr>
+        <p:style>
+          <a:lnRef idx="1">
+            <a:schemeClr val="accent1"/>
+          </a:lnRef>
+          <a:fillRef idx="3">
+            <a:schemeClr val="accent1"/>
+          </a:fillRef>
+          <a:effectRef idx="2">
+            <a:schemeClr val="accent1"/>
+          </a:effectRef>
+          <a:fontRef idx="minor">
+            <a:schemeClr val="lt1"/>
+          </a:fontRef>
+        </p:style>
+        <p:txBody>
+          <a:bodyPr rtlCol="0" anchor="ctr"/>
+          <a:lstStyle/>
+          <a:p>
+            <a:pPr algn="ctr"/>
+          </a:p>
+        </p:txBody>
+      </p:sp>
+      <p:sp>
+        <p:nvSpPr>
+          <p:cNvPr id="10" name="Rounded Rectangle 9"/>
+          <p:cNvSpPr/>
+          <p:nvPr/>
+        </p:nvSpPr>
+        <p:spPr>
+          <a:xfrm>
+            <a:off x="164592" y="1517904"/>
+            <a:ext cx="3886200" cy="530352"/>
+          </a:xfrm>
+          <a:prstGeom prst="roundRect">
+            <a:avLst>
+              <a:gd name="adj" fmla="val 8000"/>
+            </a:avLst>
+          </a:prstGeom>
+          <a:solidFill>
+            <a:srgbClr val="153964"/>
+          </a:solidFill>
+          <a:ln>
+            <a:solidFill>
+              <a:srgbClr val="153964"/>
+            </a:solidFill>
+          </a:ln>
+        </p:spPr>
+        <p:style>
+          <a:lnRef idx="1">
+            <a:schemeClr val="accent1"/>
+          </a:lnRef>
+          <a:fillRef idx="3">
+            <a:schemeClr val="accent1"/>
+          </a:fillRef>
+          <a:effectRef idx="2">
+            <a:schemeClr val="accent1"/>
+          </a:effectRef>
+          <a:fontRef idx="minor">
+            <a:schemeClr val="lt1"/>
+          </a:fontRef>
+        </p:style>
+        <p:txBody>
+          <a:bodyPr rtlCol="0" anchor="ctr"/>
+          <a:lstStyle/>
+          <a:p>
+            <a:pPr algn="ctr"/>
+          </a:p>
+        </p:txBody>
+      </p:sp>
+      <p:sp>
+        <p:nvSpPr>
+          <p:cNvPr id="11" name="TextBox 10"/>
+          <p:cNvSpPr txBox="1"/>
+          <p:nvPr/>
+        </p:nvSpPr>
+        <p:spPr>
+          <a:xfrm>
+            <a:off x="274320" y="1545336"/>
+            <a:ext cx="3666744" cy="256032"/>
+          </a:xfrm>
+          <a:prstGeom prst="rect">
+            <a:avLst/>
+          </a:prstGeom>
+          <a:noFill/>
+        </p:spPr>
+        <p:txBody>
+          <a:bodyPr wrap="square" lIns="45720" rIns="45720" tIns="18288" bIns="18288" anchor="ctr">
+            <a:spAutoFit/>
+          </a:bodyPr>
+          <a:lstStyle/>
+          <a:p>
+            <a:pPr algn="l">
+              <a:spcAft>
+                <a:spcPts val="0"/>
+              </a:spcAft>
+            </a:pPr>
+            <a:r>
+              <a:rPr sz="2000" b="1" i="0">
+                <a:solidFill>
+                  <a:srgbClr val="FFFFFF"/>
+                </a:solidFill>
+                <a:latin typeface="Aptos"/>
+              </a:rPr>
+              <a:t>Project Farm</a:t>
+            </a:r>
+          </a:p>
+        </p:txBody>
+      </p:sp>
+      <p:sp>
+        <p:nvSpPr>
+          <p:cNvPr id="12" name="TextBox 11"/>
+          <p:cNvSpPr txBox="1"/>
+          <p:nvPr/>
+        </p:nvSpPr>
+        <p:spPr>
+          <a:xfrm>
+            <a:off x="274320" y="1792224"/>
+            <a:ext cx="3666744" cy="201168"/>
+          </a:xfrm>
+          <a:prstGeom prst="rect">
+            <a:avLst/>
+          </a:prstGeom>
+          <a:noFill/>
+        </p:spPr>
+        <p:txBody>
+          <a:bodyPr wrap="square" lIns="45720" rIns="45720" tIns="18288" bIns="18288" anchor="ctr">
+            <a:spAutoFit/>
+          </a:bodyPr>
+          <a:lstStyle/>
+          <a:p>
+            <a:pPr algn="l">
+              <a:spcAft>
+                <a:spcPts val="0"/>
+              </a:spcAft>
+            </a:pPr>
+            <a:r>
+              <a:rPr sz="1000" b="0" i="0">
+                <a:solidFill>
+                  <a:srgbClr val="FFFFFF"/>
+                </a:solidFill>
+                <a:latin typeface="Aptos"/>
+              </a:rPr>
+              <a:t>YouTube product-testing channel</a:t>
+            </a:r>
+          </a:p>
+        </p:txBody>
+      </p:sp>
       <p:pic>
         <p:nvPicPr>
-          <p:cNvPr id="2" name="Picture 1" descr="a_clean_infographic_slide_style_image_with_a_white.png"/>
+          <p:cNvPr id="13" name="Picture 12" descr="project_farm_product_photo_crop.png"/>
           <p:cNvPicPr>
             <a:picLocks noChangeAspect="1"/>
           </p:cNvPicPr>
@@ -3104,14 +3587,3575 @@
         </p:blipFill>
         <p:spPr>
           <a:xfrm>
-            <a:off x="952347" y="0"/>
-            <a:ext cx="10287000" cy="6858000"/>
+            <a:off x="274320" y="2112264"/>
+            <a:ext cx="3666744" cy="1234440"/>
           </a:xfrm>
           <a:prstGeom prst="rect">
             <a:avLst/>
           </a:prstGeom>
         </p:spPr>
       </p:pic>
+      <p:sp>
+        <p:nvSpPr>
+          <p:cNvPr id="14" name="TextBox 13"/>
+          <p:cNvSpPr txBox="1"/>
+          <p:nvPr/>
+        </p:nvSpPr>
+        <p:spPr>
+          <a:xfrm>
+            <a:off x="329184" y="3383280"/>
+            <a:ext cx="3557016" cy="228600"/>
+          </a:xfrm>
+          <a:prstGeom prst="rect">
+            <a:avLst/>
+          </a:prstGeom>
+          <a:noFill/>
+        </p:spPr>
+        <p:txBody>
+          <a:bodyPr wrap="square" lIns="45720" rIns="45720" tIns="18288" bIns="18288" anchor="ctr">
+            <a:spAutoFit/>
+          </a:bodyPr>
+          <a:lstStyle/>
+          <a:p>
+            <a:pPr algn="l">
+              <a:spcAft>
+                <a:spcPts val="0"/>
+              </a:spcAft>
+            </a:pPr>
+            <a:r>
+              <a:rPr sz="1500" b="1" i="0">
+                <a:solidFill>
+                  <a:srgbClr val="153964"/>
+                </a:solidFill>
+                <a:latin typeface="Aptos"/>
+              </a:rPr>
+              <a:t>What Project Farm Does</a:t>
+            </a:r>
+          </a:p>
+        </p:txBody>
+      </p:sp>
+      <p:sp>
+        <p:nvSpPr>
+          <p:cNvPr id="15" name="Oval 14"/>
+          <p:cNvSpPr/>
+          <p:nvPr/>
+        </p:nvSpPr>
+        <p:spPr>
+          <a:xfrm>
+            <a:off x="310896" y="3685032"/>
+            <a:ext cx="246888" cy="246888"/>
+          </a:xfrm>
+          <a:prstGeom prst="ellipse">
+            <a:avLst/>
+          </a:prstGeom>
+          <a:solidFill>
+            <a:srgbClr val="153964"/>
+          </a:solidFill>
+          <a:ln>
+            <a:solidFill>
+              <a:srgbClr val="153964"/>
+            </a:solidFill>
+          </a:ln>
+        </p:spPr>
+        <p:style>
+          <a:lnRef idx="1">
+            <a:schemeClr val="accent1"/>
+          </a:lnRef>
+          <a:fillRef idx="3">
+            <a:schemeClr val="accent1"/>
+          </a:fillRef>
+          <a:effectRef idx="2">
+            <a:schemeClr val="accent1"/>
+          </a:effectRef>
+          <a:fontRef idx="minor">
+            <a:schemeClr val="lt1"/>
+          </a:fontRef>
+        </p:style>
+        <p:txBody>
+          <a:bodyPr rtlCol="0" anchor="ctr"/>
+          <a:lstStyle/>
+          <a:p>
+            <a:pPr algn="ctr"/>
+          </a:p>
+        </p:txBody>
+      </p:sp>
+      <p:sp>
+        <p:nvSpPr>
+          <p:cNvPr id="16" name="TextBox 15"/>
+          <p:cNvSpPr txBox="1"/>
+          <p:nvPr/>
+        </p:nvSpPr>
+        <p:spPr>
+          <a:xfrm>
+            <a:off x="310896" y="3680460"/>
+            <a:ext cx="246888" cy="246888"/>
+          </a:xfrm>
+          <a:prstGeom prst="rect">
+            <a:avLst/>
+          </a:prstGeom>
+          <a:noFill/>
+        </p:spPr>
+        <p:txBody>
+          <a:bodyPr wrap="square" lIns="0" rIns="0" tIns="18288" bIns="18288" anchor="ctr">
+            <a:spAutoFit/>
+          </a:bodyPr>
+          <a:lstStyle/>
+          <a:p>
+            <a:pPr algn="ctr">
+              <a:spcAft>
+                <a:spcPts val="0"/>
+              </a:spcAft>
+            </a:pPr>
+            <a:r>
+              <a:rPr sz="1000" b="1" i="0">
+                <a:solidFill>
+                  <a:srgbClr val="FFFFFF"/>
+                </a:solidFill>
+                <a:latin typeface="Aptos"/>
+              </a:rPr>
+              <a:t>1</a:t>
+            </a:r>
+          </a:p>
+        </p:txBody>
+      </p:sp>
+      <p:sp>
+        <p:nvSpPr>
+          <p:cNvPr id="17" name="TextBox 16"/>
+          <p:cNvSpPr txBox="1"/>
+          <p:nvPr/>
+        </p:nvSpPr>
+        <p:spPr>
+          <a:xfrm>
+            <a:off x="630936" y="3657600"/>
+            <a:ext cx="3273552" cy="347472"/>
+          </a:xfrm>
+          <a:prstGeom prst="rect">
+            <a:avLst/>
+          </a:prstGeom>
+          <a:noFill/>
+        </p:spPr>
+        <p:txBody>
+          <a:bodyPr wrap="square" lIns="45720" rIns="45720" tIns="18288" bIns="18288" anchor="ctr">
+            <a:spAutoFit/>
+          </a:bodyPr>
+          <a:lstStyle/>
+          <a:p>
+            <a:pPr algn="l">
+              <a:spcAft>
+                <a:spcPts val="0"/>
+              </a:spcAft>
+            </a:pPr>
+            <a:r>
+              <a:rPr sz="1019" b="0" i="0">
+                <a:solidFill>
+                  <a:srgbClr val="183A5B"/>
+                </a:solidFill>
+                <a:latin typeface="Aptos"/>
+              </a:rPr>
+              <a:t>Selects products to compare (e.g., drills, mowers, tools)</a:t>
+            </a:r>
+          </a:p>
+        </p:txBody>
+      </p:sp>
+      <p:sp>
+        <p:nvSpPr>
+          <p:cNvPr id="18" name="Oval 17"/>
+          <p:cNvSpPr/>
+          <p:nvPr/>
+        </p:nvSpPr>
+        <p:spPr>
+          <a:xfrm>
+            <a:off x="310896" y="4105656"/>
+            <a:ext cx="246888" cy="246888"/>
+          </a:xfrm>
+          <a:prstGeom prst="ellipse">
+            <a:avLst/>
+          </a:prstGeom>
+          <a:solidFill>
+            <a:srgbClr val="153964"/>
+          </a:solidFill>
+          <a:ln>
+            <a:solidFill>
+              <a:srgbClr val="153964"/>
+            </a:solidFill>
+          </a:ln>
+        </p:spPr>
+        <p:style>
+          <a:lnRef idx="1">
+            <a:schemeClr val="accent1"/>
+          </a:lnRef>
+          <a:fillRef idx="3">
+            <a:schemeClr val="accent1"/>
+          </a:fillRef>
+          <a:effectRef idx="2">
+            <a:schemeClr val="accent1"/>
+          </a:effectRef>
+          <a:fontRef idx="minor">
+            <a:schemeClr val="lt1"/>
+          </a:fontRef>
+        </p:style>
+        <p:txBody>
+          <a:bodyPr rtlCol="0" anchor="ctr"/>
+          <a:lstStyle/>
+          <a:p>
+            <a:pPr algn="ctr"/>
+          </a:p>
+        </p:txBody>
+      </p:sp>
+      <p:sp>
+        <p:nvSpPr>
+          <p:cNvPr id="19" name="TextBox 18"/>
+          <p:cNvSpPr txBox="1"/>
+          <p:nvPr/>
+        </p:nvSpPr>
+        <p:spPr>
+          <a:xfrm>
+            <a:off x="310896" y="4101084"/>
+            <a:ext cx="246888" cy="246888"/>
+          </a:xfrm>
+          <a:prstGeom prst="rect">
+            <a:avLst/>
+          </a:prstGeom>
+          <a:noFill/>
+        </p:spPr>
+        <p:txBody>
+          <a:bodyPr wrap="square" lIns="0" rIns="0" tIns="18288" bIns="18288" anchor="ctr">
+            <a:spAutoFit/>
+          </a:bodyPr>
+          <a:lstStyle/>
+          <a:p>
+            <a:pPr algn="ctr">
+              <a:spcAft>
+                <a:spcPts val="0"/>
+              </a:spcAft>
+            </a:pPr>
+            <a:r>
+              <a:rPr sz="1000" b="1" i="0">
+                <a:solidFill>
+                  <a:srgbClr val="FFFFFF"/>
+                </a:solidFill>
+                <a:latin typeface="Aptos"/>
+              </a:rPr>
+              <a:t>2</a:t>
+            </a:r>
+          </a:p>
+        </p:txBody>
+      </p:sp>
+      <p:sp>
+        <p:nvSpPr>
+          <p:cNvPr id="20" name="TextBox 19"/>
+          <p:cNvSpPr txBox="1"/>
+          <p:nvPr/>
+        </p:nvSpPr>
+        <p:spPr>
+          <a:xfrm>
+            <a:off x="630936" y="4078224"/>
+            <a:ext cx="3273552" cy="347472"/>
+          </a:xfrm>
+          <a:prstGeom prst="rect">
+            <a:avLst/>
+          </a:prstGeom>
+          <a:noFill/>
+        </p:spPr>
+        <p:txBody>
+          <a:bodyPr wrap="square" lIns="45720" rIns="45720" tIns="18288" bIns="18288" anchor="ctr">
+            <a:spAutoFit/>
+          </a:bodyPr>
+          <a:lstStyle/>
+          <a:p>
+            <a:pPr algn="l">
+              <a:spcAft>
+                <a:spcPts val="0"/>
+              </a:spcAft>
+            </a:pPr>
+            <a:r>
+              <a:rPr sz="1019" b="0" i="0">
+                <a:solidFill>
+                  <a:srgbClr val="183A5B"/>
+                </a:solidFill>
+                <a:latin typeface="Aptos"/>
+              </a:rPr>
+              <a:t>Defines performance criteria (power, runtime, speed, durability)</a:t>
+            </a:r>
+          </a:p>
+        </p:txBody>
+      </p:sp>
+      <p:sp>
+        <p:nvSpPr>
+          <p:cNvPr id="21" name="Oval 20"/>
+          <p:cNvSpPr/>
+          <p:nvPr/>
+        </p:nvSpPr>
+        <p:spPr>
+          <a:xfrm>
+            <a:off x="310896" y="4526280"/>
+            <a:ext cx="246888" cy="246888"/>
+          </a:xfrm>
+          <a:prstGeom prst="ellipse">
+            <a:avLst/>
+          </a:prstGeom>
+          <a:solidFill>
+            <a:srgbClr val="153964"/>
+          </a:solidFill>
+          <a:ln>
+            <a:solidFill>
+              <a:srgbClr val="153964"/>
+            </a:solidFill>
+          </a:ln>
+        </p:spPr>
+        <p:style>
+          <a:lnRef idx="1">
+            <a:schemeClr val="accent1"/>
+          </a:lnRef>
+          <a:fillRef idx="3">
+            <a:schemeClr val="accent1"/>
+          </a:fillRef>
+          <a:effectRef idx="2">
+            <a:schemeClr val="accent1"/>
+          </a:effectRef>
+          <a:fontRef idx="minor">
+            <a:schemeClr val="lt1"/>
+          </a:fontRef>
+        </p:style>
+        <p:txBody>
+          <a:bodyPr rtlCol="0" anchor="ctr"/>
+          <a:lstStyle/>
+          <a:p>
+            <a:pPr algn="ctr"/>
+          </a:p>
+        </p:txBody>
+      </p:sp>
+      <p:sp>
+        <p:nvSpPr>
+          <p:cNvPr id="22" name="TextBox 21"/>
+          <p:cNvSpPr txBox="1"/>
+          <p:nvPr/>
+        </p:nvSpPr>
+        <p:spPr>
+          <a:xfrm>
+            <a:off x="310896" y="4521708"/>
+            <a:ext cx="246888" cy="246888"/>
+          </a:xfrm>
+          <a:prstGeom prst="rect">
+            <a:avLst/>
+          </a:prstGeom>
+          <a:noFill/>
+        </p:spPr>
+        <p:txBody>
+          <a:bodyPr wrap="square" lIns="0" rIns="0" tIns="18288" bIns="18288" anchor="ctr">
+            <a:spAutoFit/>
+          </a:bodyPr>
+          <a:lstStyle/>
+          <a:p>
+            <a:pPr algn="ctr">
+              <a:spcAft>
+                <a:spcPts val="0"/>
+              </a:spcAft>
+            </a:pPr>
+            <a:r>
+              <a:rPr sz="1000" b="1" i="0">
+                <a:solidFill>
+                  <a:srgbClr val="FFFFFF"/>
+                </a:solidFill>
+                <a:latin typeface="Aptos"/>
+              </a:rPr>
+              <a:t>3</a:t>
+            </a:r>
+          </a:p>
+        </p:txBody>
+      </p:sp>
+      <p:sp>
+        <p:nvSpPr>
+          <p:cNvPr id="23" name="TextBox 22"/>
+          <p:cNvSpPr txBox="1"/>
+          <p:nvPr/>
+        </p:nvSpPr>
+        <p:spPr>
+          <a:xfrm>
+            <a:off x="630936" y="4498848"/>
+            <a:ext cx="3273552" cy="347472"/>
+          </a:xfrm>
+          <a:prstGeom prst="rect">
+            <a:avLst/>
+          </a:prstGeom>
+          <a:noFill/>
+        </p:spPr>
+        <p:txBody>
+          <a:bodyPr wrap="square" lIns="45720" rIns="45720" tIns="18288" bIns="18288" anchor="ctr">
+            <a:spAutoFit/>
+          </a:bodyPr>
+          <a:lstStyle/>
+          <a:p>
+            <a:pPr algn="l">
+              <a:spcAft>
+                <a:spcPts val="0"/>
+              </a:spcAft>
+            </a:pPr>
+            <a:r>
+              <a:rPr sz="1019" b="0" i="0">
+                <a:solidFill>
+                  <a:srgbClr val="183A5B"/>
+                </a:solidFill>
+                <a:latin typeface="Aptos"/>
+              </a:rPr>
+              <a:t>Tests each product under consistent conditions</a:t>
+            </a:r>
+          </a:p>
+        </p:txBody>
+      </p:sp>
+      <p:sp>
+        <p:nvSpPr>
+          <p:cNvPr id="24" name="Oval 23"/>
+          <p:cNvSpPr/>
+          <p:nvPr/>
+        </p:nvSpPr>
+        <p:spPr>
+          <a:xfrm>
+            <a:off x="310896" y="4946904"/>
+            <a:ext cx="246888" cy="246888"/>
+          </a:xfrm>
+          <a:prstGeom prst="ellipse">
+            <a:avLst/>
+          </a:prstGeom>
+          <a:solidFill>
+            <a:srgbClr val="153964"/>
+          </a:solidFill>
+          <a:ln>
+            <a:solidFill>
+              <a:srgbClr val="153964"/>
+            </a:solidFill>
+          </a:ln>
+        </p:spPr>
+        <p:style>
+          <a:lnRef idx="1">
+            <a:schemeClr val="accent1"/>
+          </a:lnRef>
+          <a:fillRef idx="3">
+            <a:schemeClr val="accent1"/>
+          </a:fillRef>
+          <a:effectRef idx="2">
+            <a:schemeClr val="accent1"/>
+          </a:effectRef>
+          <a:fontRef idx="minor">
+            <a:schemeClr val="lt1"/>
+          </a:fontRef>
+        </p:style>
+        <p:txBody>
+          <a:bodyPr rtlCol="0" anchor="ctr"/>
+          <a:lstStyle/>
+          <a:p>
+            <a:pPr algn="ctr"/>
+          </a:p>
+        </p:txBody>
+      </p:sp>
+      <p:sp>
+        <p:nvSpPr>
+          <p:cNvPr id="25" name="TextBox 24"/>
+          <p:cNvSpPr txBox="1"/>
+          <p:nvPr/>
+        </p:nvSpPr>
+        <p:spPr>
+          <a:xfrm>
+            <a:off x="310896" y="4942332"/>
+            <a:ext cx="246888" cy="246888"/>
+          </a:xfrm>
+          <a:prstGeom prst="rect">
+            <a:avLst/>
+          </a:prstGeom>
+          <a:noFill/>
+        </p:spPr>
+        <p:txBody>
+          <a:bodyPr wrap="square" lIns="0" rIns="0" tIns="18288" bIns="18288" anchor="ctr">
+            <a:spAutoFit/>
+          </a:bodyPr>
+          <a:lstStyle/>
+          <a:p>
+            <a:pPr algn="ctr">
+              <a:spcAft>
+                <a:spcPts val="0"/>
+              </a:spcAft>
+            </a:pPr>
+            <a:r>
+              <a:rPr sz="1000" b="1" i="0">
+                <a:solidFill>
+                  <a:srgbClr val="FFFFFF"/>
+                </a:solidFill>
+                <a:latin typeface="Aptos"/>
+              </a:rPr>
+              <a:t>4</a:t>
+            </a:r>
+          </a:p>
+        </p:txBody>
+      </p:sp>
+      <p:sp>
+        <p:nvSpPr>
+          <p:cNvPr id="26" name="TextBox 25"/>
+          <p:cNvSpPr txBox="1"/>
+          <p:nvPr/>
+        </p:nvSpPr>
+        <p:spPr>
+          <a:xfrm>
+            <a:off x="630936" y="4919472"/>
+            <a:ext cx="3273552" cy="347472"/>
+          </a:xfrm>
+          <a:prstGeom prst="rect">
+            <a:avLst/>
+          </a:prstGeom>
+          <a:noFill/>
+        </p:spPr>
+        <p:txBody>
+          <a:bodyPr wrap="square" lIns="45720" rIns="45720" tIns="18288" bIns="18288" anchor="ctr">
+            <a:spAutoFit/>
+          </a:bodyPr>
+          <a:lstStyle/>
+          <a:p>
+            <a:pPr algn="l">
+              <a:spcAft>
+                <a:spcPts val="0"/>
+              </a:spcAft>
+            </a:pPr>
+            <a:r>
+              <a:rPr sz="1019" b="0" i="0">
+                <a:solidFill>
+                  <a:srgbClr val="183A5B"/>
+                </a:solidFill>
+                <a:latin typeface="Aptos"/>
+              </a:rPr>
+              <a:t>Measures and compares the results</a:t>
+            </a:r>
+          </a:p>
+        </p:txBody>
+      </p:sp>
+      <p:sp>
+        <p:nvSpPr>
+          <p:cNvPr id="27" name="Oval 26"/>
+          <p:cNvSpPr/>
+          <p:nvPr/>
+        </p:nvSpPr>
+        <p:spPr>
+          <a:xfrm>
+            <a:off x="310896" y="5367528"/>
+            <a:ext cx="246888" cy="246888"/>
+          </a:xfrm>
+          <a:prstGeom prst="ellipse">
+            <a:avLst/>
+          </a:prstGeom>
+          <a:solidFill>
+            <a:srgbClr val="153964"/>
+          </a:solidFill>
+          <a:ln>
+            <a:solidFill>
+              <a:srgbClr val="153964"/>
+            </a:solidFill>
+          </a:ln>
+        </p:spPr>
+        <p:style>
+          <a:lnRef idx="1">
+            <a:schemeClr val="accent1"/>
+          </a:lnRef>
+          <a:fillRef idx="3">
+            <a:schemeClr val="accent1"/>
+          </a:fillRef>
+          <a:effectRef idx="2">
+            <a:schemeClr val="accent1"/>
+          </a:effectRef>
+          <a:fontRef idx="minor">
+            <a:schemeClr val="lt1"/>
+          </a:fontRef>
+        </p:style>
+        <p:txBody>
+          <a:bodyPr rtlCol="0" anchor="ctr"/>
+          <a:lstStyle/>
+          <a:p>
+            <a:pPr algn="ctr"/>
+          </a:p>
+        </p:txBody>
+      </p:sp>
+      <p:sp>
+        <p:nvSpPr>
+          <p:cNvPr id="28" name="TextBox 27"/>
+          <p:cNvSpPr txBox="1"/>
+          <p:nvPr/>
+        </p:nvSpPr>
+        <p:spPr>
+          <a:xfrm>
+            <a:off x="310896" y="5362956"/>
+            <a:ext cx="246888" cy="246888"/>
+          </a:xfrm>
+          <a:prstGeom prst="rect">
+            <a:avLst/>
+          </a:prstGeom>
+          <a:noFill/>
+        </p:spPr>
+        <p:txBody>
+          <a:bodyPr wrap="square" lIns="0" rIns="0" tIns="18288" bIns="18288" anchor="ctr">
+            <a:spAutoFit/>
+          </a:bodyPr>
+          <a:lstStyle/>
+          <a:p>
+            <a:pPr algn="ctr">
+              <a:spcAft>
+                <a:spcPts val="0"/>
+              </a:spcAft>
+            </a:pPr>
+            <a:r>
+              <a:rPr sz="1000" b="1" i="0">
+                <a:solidFill>
+                  <a:srgbClr val="FFFFFF"/>
+                </a:solidFill>
+                <a:latin typeface="Aptos"/>
+              </a:rPr>
+              <a:t>5</a:t>
+            </a:r>
+          </a:p>
+        </p:txBody>
+      </p:sp>
+      <p:sp>
+        <p:nvSpPr>
+          <p:cNvPr id="29" name="TextBox 28"/>
+          <p:cNvSpPr txBox="1"/>
+          <p:nvPr/>
+        </p:nvSpPr>
+        <p:spPr>
+          <a:xfrm>
+            <a:off x="630936" y="5340096"/>
+            <a:ext cx="3273552" cy="347472"/>
+          </a:xfrm>
+          <a:prstGeom prst="rect">
+            <a:avLst/>
+          </a:prstGeom>
+          <a:noFill/>
+        </p:spPr>
+        <p:txBody>
+          <a:bodyPr wrap="square" lIns="45720" rIns="45720" tIns="18288" bIns="18288" anchor="ctr">
+            <a:spAutoFit/>
+          </a:bodyPr>
+          <a:lstStyle/>
+          <a:p>
+            <a:pPr algn="l">
+              <a:spcAft>
+                <a:spcPts val="0"/>
+              </a:spcAft>
+            </a:pPr>
+            <a:r>
+              <a:rPr sz="1019" b="0" i="0">
+                <a:solidFill>
+                  <a:srgbClr val="183A5B"/>
+                </a:solidFill>
+                <a:latin typeface="Aptos"/>
+              </a:rPr>
+              <a:t>Ranks options and recommends a winner</a:t>
+            </a:r>
+          </a:p>
+        </p:txBody>
+      </p:sp>
+      <p:sp>
+        <p:nvSpPr>
+          <p:cNvPr id="30" name="Rounded Rectangle 29"/>
+          <p:cNvSpPr/>
+          <p:nvPr/>
+        </p:nvSpPr>
+        <p:spPr>
+          <a:xfrm>
+            <a:off x="4160520" y="1517904"/>
+            <a:ext cx="3886200" cy="530352"/>
+          </a:xfrm>
+          <a:prstGeom prst="roundRect">
+            <a:avLst>
+              <a:gd name="adj" fmla="val 8000"/>
+            </a:avLst>
+          </a:prstGeom>
+          <a:solidFill>
+            <a:srgbClr val="D8E9F5"/>
+          </a:solidFill>
+          <a:ln>
+            <a:solidFill>
+              <a:srgbClr val="D8E9F5"/>
+            </a:solidFill>
+          </a:ln>
+        </p:spPr>
+        <p:style>
+          <a:lnRef idx="1">
+            <a:schemeClr val="accent1"/>
+          </a:lnRef>
+          <a:fillRef idx="3">
+            <a:schemeClr val="accent1"/>
+          </a:fillRef>
+          <a:effectRef idx="2">
+            <a:schemeClr val="accent1"/>
+          </a:effectRef>
+          <a:fontRef idx="minor">
+            <a:schemeClr val="lt1"/>
+          </a:fontRef>
+        </p:style>
+        <p:txBody>
+          <a:bodyPr rtlCol="0" anchor="ctr"/>
+          <a:lstStyle/>
+          <a:p>
+            <a:pPr algn="ctr"/>
+          </a:p>
+        </p:txBody>
+      </p:sp>
+      <p:sp>
+        <p:nvSpPr>
+          <p:cNvPr id="31" name="TextBox 30"/>
+          <p:cNvSpPr txBox="1"/>
+          <p:nvPr/>
+        </p:nvSpPr>
+        <p:spPr>
+          <a:xfrm>
+            <a:off x="4251959" y="1572768"/>
+            <a:ext cx="3703320" cy="384048"/>
+          </a:xfrm>
+          <a:prstGeom prst="rect">
+            <a:avLst/>
+          </a:prstGeom>
+          <a:noFill/>
+        </p:spPr>
+        <p:txBody>
+          <a:bodyPr wrap="square" lIns="45720" rIns="45720" tIns="18288" bIns="18288" anchor="ctr">
+            <a:spAutoFit/>
+          </a:bodyPr>
+          <a:lstStyle/>
+          <a:p>
+            <a:pPr algn="ctr">
+              <a:spcAft>
+                <a:spcPts val="0"/>
+              </a:spcAft>
+            </a:pPr>
+            <a:r>
+              <a:rPr sz="2000" b="1" i="0">
+                <a:solidFill>
+                  <a:srgbClr val="153964"/>
+                </a:solidFill>
+                <a:latin typeface="Aptos"/>
+              </a:rPr>
+              <a:t>The Analogy</a:t>
+            </a:r>
+          </a:p>
+        </p:txBody>
+      </p:sp>
+      <p:sp>
+        <p:nvSpPr>
+          <p:cNvPr id="32" name="Rounded Rectangle 31"/>
+          <p:cNvSpPr/>
+          <p:nvPr/>
+        </p:nvSpPr>
+        <p:spPr>
+          <a:xfrm>
+            <a:off x="4270248" y="2167128"/>
+            <a:ext cx="3666744" cy="667512"/>
+          </a:xfrm>
+          <a:prstGeom prst="roundRect">
+            <a:avLst>
+              <a:gd name="adj" fmla="val 8000"/>
+            </a:avLst>
+          </a:prstGeom>
+          <a:solidFill>
+            <a:srgbClr val="FFFFFF"/>
+          </a:solidFill>
+          <a:ln>
+            <a:solidFill>
+              <a:srgbClr val="C7DBEA"/>
+            </a:solidFill>
+          </a:ln>
+        </p:spPr>
+        <p:style>
+          <a:lnRef idx="1">
+            <a:schemeClr val="accent1"/>
+          </a:lnRef>
+          <a:fillRef idx="3">
+            <a:schemeClr val="accent1"/>
+          </a:fillRef>
+          <a:effectRef idx="2">
+            <a:schemeClr val="accent1"/>
+          </a:effectRef>
+          <a:fontRef idx="minor">
+            <a:schemeClr val="lt1"/>
+          </a:fontRef>
+        </p:style>
+        <p:txBody>
+          <a:bodyPr rtlCol="0" anchor="ctr"/>
+          <a:lstStyle/>
+          <a:p>
+            <a:pPr algn="ctr"/>
+          </a:p>
+        </p:txBody>
+      </p:sp>
+      <p:sp>
+        <p:nvSpPr>
+          <p:cNvPr id="33" name="TextBox 32"/>
+          <p:cNvSpPr txBox="1"/>
+          <p:nvPr/>
+        </p:nvSpPr>
+        <p:spPr>
+          <a:xfrm>
+            <a:off x="4361688" y="2212848"/>
+            <a:ext cx="1188720" cy="219456"/>
+          </a:xfrm>
+          <a:prstGeom prst="rect">
+            <a:avLst/>
+          </a:prstGeom>
+          <a:noFill/>
+        </p:spPr>
+        <p:txBody>
+          <a:bodyPr wrap="square" lIns="45720" rIns="45720" tIns="18288" bIns="18288" anchor="ctr">
+            <a:spAutoFit/>
+          </a:bodyPr>
+          <a:lstStyle/>
+          <a:p>
+            <a:pPr algn="ctr">
+              <a:spcAft>
+                <a:spcPts val="0"/>
+              </a:spcAft>
+            </a:pPr>
+            <a:r>
+              <a:rPr sz="1000" b="1" i="0">
+                <a:solidFill>
+                  <a:srgbClr val="153964"/>
+                </a:solidFill>
+                <a:latin typeface="Aptos"/>
+              </a:rPr>
+              <a:t>PRODUCTS</a:t>
+            </a:r>
+          </a:p>
+        </p:txBody>
+      </p:sp>
+      <p:sp>
+        <p:nvSpPr>
+          <p:cNvPr id="34" name="TextBox 33"/>
+          <p:cNvSpPr txBox="1"/>
+          <p:nvPr/>
+        </p:nvSpPr>
+        <p:spPr>
+          <a:xfrm>
+            <a:off x="5586983" y="2194560"/>
+            <a:ext cx="365760" cy="256032"/>
+          </a:xfrm>
+          <a:prstGeom prst="rect">
+            <a:avLst/>
+          </a:prstGeom>
+          <a:noFill/>
+        </p:spPr>
+        <p:txBody>
+          <a:bodyPr wrap="square" lIns="45720" rIns="45720" tIns="18288" bIns="18288" anchor="ctr">
+            <a:spAutoFit/>
+          </a:bodyPr>
+          <a:lstStyle/>
+          <a:p>
+            <a:pPr algn="ctr">
+              <a:spcAft>
+                <a:spcPts val="0"/>
+              </a:spcAft>
+            </a:pPr>
+            <a:r>
+              <a:rPr sz="2200" b="1" i="0">
+                <a:solidFill>
+                  <a:srgbClr val="285B91"/>
+                </a:solidFill>
+                <a:latin typeface="Aptos"/>
+              </a:rPr>
+              <a:t>↔</a:t>
+            </a:r>
+          </a:p>
+        </p:txBody>
+      </p:sp>
+      <p:sp>
+        <p:nvSpPr>
+          <p:cNvPr id="35" name="TextBox 34"/>
+          <p:cNvSpPr txBox="1"/>
+          <p:nvPr/>
+        </p:nvSpPr>
+        <p:spPr>
+          <a:xfrm>
+            <a:off x="5971031" y="2212848"/>
+            <a:ext cx="1783080" cy="219456"/>
+          </a:xfrm>
+          <a:prstGeom prst="rect">
+            <a:avLst/>
+          </a:prstGeom>
+          <a:noFill/>
+        </p:spPr>
+        <p:txBody>
+          <a:bodyPr wrap="square" lIns="45720" rIns="45720" tIns="18288" bIns="18288" anchor="ctr">
+            <a:spAutoFit/>
+          </a:bodyPr>
+          <a:lstStyle/>
+          <a:p>
+            <a:pPr algn="ctr">
+              <a:spcAft>
+                <a:spcPts val="0"/>
+              </a:spcAft>
+            </a:pPr>
+            <a:r>
+              <a:rPr sz="950" b="1" i="0">
+                <a:solidFill>
+                  <a:srgbClr val="153964"/>
+                </a:solidFill>
+                <a:latin typeface="Aptos"/>
+              </a:rPr>
+              <a:t>FACTORS / VARIABLES</a:t>
+            </a:r>
+          </a:p>
+        </p:txBody>
+      </p:sp>
+      <p:sp>
+        <p:nvSpPr>
+          <p:cNvPr id="36" name="TextBox 35"/>
+          <p:cNvSpPr txBox="1"/>
+          <p:nvPr/>
+        </p:nvSpPr>
+        <p:spPr>
+          <a:xfrm>
+            <a:off x="4343400" y="2459736"/>
+            <a:ext cx="3520440" cy="283464"/>
+          </a:xfrm>
+          <a:prstGeom prst="rect">
+            <a:avLst/>
+          </a:prstGeom>
+          <a:noFill/>
+        </p:spPr>
+        <p:txBody>
+          <a:bodyPr wrap="square" lIns="45720" rIns="45720" tIns="18288" bIns="18288" anchor="ctr">
+            <a:spAutoFit/>
+          </a:bodyPr>
+          <a:lstStyle/>
+          <a:p>
+            <a:pPr algn="ctr">
+              <a:spcAft>
+                <a:spcPts val="0"/>
+              </a:spcAft>
+            </a:pPr>
+            <a:r>
+              <a:rPr sz="919" b="0" i="0">
+                <a:solidFill>
+                  <a:srgbClr val="4D677F"/>
+                </a:solidFill>
+                <a:latin typeface="Aptos"/>
+              </a:rPr>
+              <a:t>Products chosen to compare ↔ Factors deliberately varied</a:t>
+            </a:r>
+          </a:p>
+        </p:txBody>
+      </p:sp>
+      <p:sp>
+        <p:nvSpPr>
+          <p:cNvPr id="37" name="Rounded Rectangle 36"/>
+          <p:cNvSpPr/>
+          <p:nvPr/>
+        </p:nvSpPr>
+        <p:spPr>
+          <a:xfrm>
+            <a:off x="4270248" y="2880360"/>
+            <a:ext cx="3666744" cy="667512"/>
+          </a:xfrm>
+          <a:prstGeom prst="roundRect">
+            <a:avLst>
+              <a:gd name="adj" fmla="val 8000"/>
+            </a:avLst>
+          </a:prstGeom>
+          <a:solidFill>
+            <a:srgbClr val="FFFFFF"/>
+          </a:solidFill>
+          <a:ln>
+            <a:solidFill>
+              <a:srgbClr val="C7DBEA"/>
+            </a:solidFill>
+          </a:ln>
+        </p:spPr>
+        <p:style>
+          <a:lnRef idx="1">
+            <a:schemeClr val="accent1"/>
+          </a:lnRef>
+          <a:fillRef idx="3">
+            <a:schemeClr val="accent1"/>
+          </a:fillRef>
+          <a:effectRef idx="2">
+            <a:schemeClr val="accent1"/>
+          </a:effectRef>
+          <a:fontRef idx="minor">
+            <a:schemeClr val="lt1"/>
+          </a:fontRef>
+        </p:style>
+        <p:txBody>
+          <a:bodyPr rtlCol="0" anchor="ctr"/>
+          <a:lstStyle/>
+          <a:p>
+            <a:pPr algn="ctr"/>
+          </a:p>
+        </p:txBody>
+      </p:sp>
+      <p:sp>
+        <p:nvSpPr>
+          <p:cNvPr id="38" name="TextBox 37"/>
+          <p:cNvSpPr txBox="1"/>
+          <p:nvPr/>
+        </p:nvSpPr>
+        <p:spPr>
+          <a:xfrm>
+            <a:off x="4361688" y="2926080"/>
+            <a:ext cx="1188720" cy="219456"/>
+          </a:xfrm>
+          <a:prstGeom prst="rect">
+            <a:avLst/>
+          </a:prstGeom>
+          <a:noFill/>
+        </p:spPr>
+        <p:txBody>
+          <a:bodyPr wrap="square" lIns="45720" rIns="45720" tIns="18288" bIns="18288" anchor="ctr">
+            <a:spAutoFit/>
+          </a:bodyPr>
+          <a:lstStyle/>
+          <a:p>
+            <a:pPr algn="ctr">
+              <a:spcAft>
+                <a:spcPts val="0"/>
+              </a:spcAft>
+            </a:pPr>
+            <a:r>
+              <a:rPr sz="1000" b="1" i="0">
+                <a:solidFill>
+                  <a:srgbClr val="153964"/>
+                </a:solidFill>
+                <a:latin typeface="Aptos"/>
+              </a:rPr>
+              <a:t>CRITERIA</a:t>
+            </a:r>
+          </a:p>
+        </p:txBody>
+      </p:sp>
+      <p:sp>
+        <p:nvSpPr>
+          <p:cNvPr id="39" name="TextBox 38"/>
+          <p:cNvSpPr txBox="1"/>
+          <p:nvPr/>
+        </p:nvSpPr>
+        <p:spPr>
+          <a:xfrm>
+            <a:off x="5586983" y="2907792"/>
+            <a:ext cx="365760" cy="256032"/>
+          </a:xfrm>
+          <a:prstGeom prst="rect">
+            <a:avLst/>
+          </a:prstGeom>
+          <a:noFill/>
+        </p:spPr>
+        <p:txBody>
+          <a:bodyPr wrap="square" lIns="45720" rIns="45720" tIns="18288" bIns="18288" anchor="ctr">
+            <a:spAutoFit/>
+          </a:bodyPr>
+          <a:lstStyle/>
+          <a:p>
+            <a:pPr algn="ctr">
+              <a:spcAft>
+                <a:spcPts val="0"/>
+              </a:spcAft>
+            </a:pPr>
+            <a:r>
+              <a:rPr sz="2200" b="1" i="0">
+                <a:solidFill>
+                  <a:srgbClr val="285B91"/>
+                </a:solidFill>
+                <a:latin typeface="Aptos"/>
+              </a:rPr>
+              <a:t>↔</a:t>
+            </a:r>
+          </a:p>
+        </p:txBody>
+      </p:sp>
+      <p:sp>
+        <p:nvSpPr>
+          <p:cNvPr id="40" name="TextBox 39"/>
+          <p:cNvSpPr txBox="1"/>
+          <p:nvPr/>
+        </p:nvSpPr>
+        <p:spPr>
+          <a:xfrm>
+            <a:off x="5971031" y="2926080"/>
+            <a:ext cx="1783080" cy="219456"/>
+          </a:xfrm>
+          <a:prstGeom prst="rect">
+            <a:avLst/>
+          </a:prstGeom>
+          <a:noFill/>
+        </p:spPr>
+        <p:txBody>
+          <a:bodyPr wrap="square" lIns="45720" rIns="45720" tIns="18288" bIns="18288" anchor="ctr">
+            <a:spAutoFit/>
+          </a:bodyPr>
+          <a:lstStyle/>
+          <a:p>
+            <a:pPr algn="ctr">
+              <a:spcAft>
+                <a:spcPts val="0"/>
+              </a:spcAft>
+            </a:pPr>
+            <a:r>
+              <a:rPr sz="950" b="1" i="0">
+                <a:solidFill>
+                  <a:srgbClr val="153964"/>
+                </a:solidFill>
+                <a:latin typeface="Aptos"/>
+              </a:rPr>
+              <a:t>RESPONSES</a:t>
+            </a:r>
+          </a:p>
+        </p:txBody>
+      </p:sp>
+      <p:sp>
+        <p:nvSpPr>
+          <p:cNvPr id="41" name="TextBox 40"/>
+          <p:cNvSpPr txBox="1"/>
+          <p:nvPr/>
+        </p:nvSpPr>
+        <p:spPr>
+          <a:xfrm>
+            <a:off x="4343400" y="3172968"/>
+            <a:ext cx="3520440" cy="283464"/>
+          </a:xfrm>
+          <a:prstGeom prst="rect">
+            <a:avLst/>
+          </a:prstGeom>
+          <a:noFill/>
+        </p:spPr>
+        <p:txBody>
+          <a:bodyPr wrap="square" lIns="45720" rIns="45720" tIns="18288" bIns="18288" anchor="ctr">
+            <a:spAutoFit/>
+          </a:bodyPr>
+          <a:lstStyle/>
+          <a:p>
+            <a:pPr algn="ctr">
+              <a:spcAft>
+                <a:spcPts val="0"/>
+              </a:spcAft>
+            </a:pPr>
+            <a:r>
+              <a:rPr sz="919" b="0" i="0">
+                <a:solidFill>
+                  <a:srgbClr val="4D677F"/>
+                </a:solidFill>
+                <a:latin typeface="Aptos"/>
+              </a:rPr>
+              <a:t>Power, runtime, durability ↔ Measured performance</a:t>
+            </a:r>
+          </a:p>
+        </p:txBody>
+      </p:sp>
+      <p:sp>
+        <p:nvSpPr>
+          <p:cNvPr id="42" name="Rounded Rectangle 41"/>
+          <p:cNvSpPr/>
+          <p:nvPr/>
+        </p:nvSpPr>
+        <p:spPr>
+          <a:xfrm>
+            <a:off x="4270248" y="3593592"/>
+            <a:ext cx="3666744" cy="667512"/>
+          </a:xfrm>
+          <a:prstGeom prst="roundRect">
+            <a:avLst>
+              <a:gd name="adj" fmla="val 8000"/>
+            </a:avLst>
+          </a:prstGeom>
+          <a:solidFill>
+            <a:srgbClr val="FFFFFF"/>
+          </a:solidFill>
+          <a:ln>
+            <a:solidFill>
+              <a:srgbClr val="C7DBEA"/>
+            </a:solidFill>
+          </a:ln>
+        </p:spPr>
+        <p:style>
+          <a:lnRef idx="1">
+            <a:schemeClr val="accent1"/>
+          </a:lnRef>
+          <a:fillRef idx="3">
+            <a:schemeClr val="accent1"/>
+          </a:fillRef>
+          <a:effectRef idx="2">
+            <a:schemeClr val="accent1"/>
+          </a:effectRef>
+          <a:fontRef idx="minor">
+            <a:schemeClr val="lt1"/>
+          </a:fontRef>
+        </p:style>
+        <p:txBody>
+          <a:bodyPr rtlCol="0" anchor="ctr"/>
+          <a:lstStyle/>
+          <a:p>
+            <a:pPr algn="ctr"/>
+          </a:p>
+        </p:txBody>
+      </p:sp>
+      <p:sp>
+        <p:nvSpPr>
+          <p:cNvPr id="43" name="TextBox 42"/>
+          <p:cNvSpPr txBox="1"/>
+          <p:nvPr/>
+        </p:nvSpPr>
+        <p:spPr>
+          <a:xfrm>
+            <a:off x="4361688" y="3639312"/>
+            <a:ext cx="1188720" cy="219456"/>
+          </a:xfrm>
+          <a:prstGeom prst="rect">
+            <a:avLst/>
+          </a:prstGeom>
+          <a:noFill/>
+        </p:spPr>
+        <p:txBody>
+          <a:bodyPr wrap="square" lIns="45720" rIns="45720" tIns="18288" bIns="18288" anchor="ctr">
+            <a:spAutoFit/>
+          </a:bodyPr>
+          <a:lstStyle/>
+          <a:p>
+            <a:pPr algn="ctr">
+              <a:spcAft>
+                <a:spcPts val="0"/>
+              </a:spcAft>
+            </a:pPr>
+            <a:r>
+              <a:rPr sz="1000" b="1" i="0">
+                <a:solidFill>
+                  <a:srgbClr val="153964"/>
+                </a:solidFill>
+                <a:latin typeface="Aptos"/>
+              </a:rPr>
+              <a:t>TEST CONDITIONS</a:t>
+            </a:r>
+          </a:p>
+        </p:txBody>
+      </p:sp>
+      <p:sp>
+        <p:nvSpPr>
+          <p:cNvPr id="44" name="TextBox 43"/>
+          <p:cNvSpPr txBox="1"/>
+          <p:nvPr/>
+        </p:nvSpPr>
+        <p:spPr>
+          <a:xfrm>
+            <a:off x="5586983" y="3621024"/>
+            <a:ext cx="365760" cy="256032"/>
+          </a:xfrm>
+          <a:prstGeom prst="rect">
+            <a:avLst/>
+          </a:prstGeom>
+          <a:noFill/>
+        </p:spPr>
+        <p:txBody>
+          <a:bodyPr wrap="square" lIns="45720" rIns="45720" tIns="18288" bIns="18288" anchor="ctr">
+            <a:spAutoFit/>
+          </a:bodyPr>
+          <a:lstStyle/>
+          <a:p>
+            <a:pPr algn="ctr">
+              <a:spcAft>
+                <a:spcPts val="0"/>
+              </a:spcAft>
+            </a:pPr>
+            <a:r>
+              <a:rPr sz="2200" b="1" i="0">
+                <a:solidFill>
+                  <a:srgbClr val="285B91"/>
+                </a:solidFill>
+                <a:latin typeface="Aptos"/>
+              </a:rPr>
+              <a:t>↔</a:t>
+            </a:r>
+          </a:p>
+        </p:txBody>
+      </p:sp>
+      <p:sp>
+        <p:nvSpPr>
+          <p:cNvPr id="45" name="TextBox 44"/>
+          <p:cNvSpPr txBox="1"/>
+          <p:nvPr/>
+        </p:nvSpPr>
+        <p:spPr>
+          <a:xfrm>
+            <a:off x="5971031" y="3639312"/>
+            <a:ext cx="1783080" cy="219456"/>
+          </a:xfrm>
+          <a:prstGeom prst="rect">
+            <a:avLst/>
+          </a:prstGeom>
+          <a:noFill/>
+        </p:spPr>
+        <p:txBody>
+          <a:bodyPr wrap="square" lIns="45720" rIns="45720" tIns="18288" bIns="18288" anchor="ctr">
+            <a:spAutoFit/>
+          </a:bodyPr>
+          <a:lstStyle/>
+          <a:p>
+            <a:pPr algn="ctr">
+              <a:spcAft>
+                <a:spcPts val="0"/>
+              </a:spcAft>
+            </a:pPr>
+            <a:r>
+              <a:rPr sz="950" b="1" i="0">
+                <a:solidFill>
+                  <a:srgbClr val="153964"/>
+                </a:solidFill>
+                <a:latin typeface="Aptos"/>
+              </a:rPr>
+              <a:t>EXPERIMENTAL DESIGN</a:t>
+            </a:r>
+          </a:p>
+        </p:txBody>
+      </p:sp>
+      <p:sp>
+        <p:nvSpPr>
+          <p:cNvPr id="46" name="TextBox 45"/>
+          <p:cNvSpPr txBox="1"/>
+          <p:nvPr/>
+        </p:nvSpPr>
+        <p:spPr>
+          <a:xfrm>
+            <a:off x="4343400" y="3886200"/>
+            <a:ext cx="3520440" cy="283464"/>
+          </a:xfrm>
+          <a:prstGeom prst="rect">
+            <a:avLst/>
+          </a:prstGeom>
+          <a:noFill/>
+        </p:spPr>
+        <p:txBody>
+          <a:bodyPr wrap="square" lIns="45720" rIns="45720" tIns="18288" bIns="18288" anchor="ctr">
+            <a:spAutoFit/>
+          </a:bodyPr>
+          <a:lstStyle/>
+          <a:p>
+            <a:pPr algn="ctr">
+              <a:spcAft>
+                <a:spcPts val="0"/>
+              </a:spcAft>
+            </a:pPr>
+            <a:r>
+              <a:rPr sz="919" b="0" i="0">
+                <a:solidFill>
+                  <a:srgbClr val="4D677F"/>
+                </a:solidFill>
+                <a:latin typeface="Aptos"/>
+              </a:rPr>
+              <a:t>Repeatable procedures ↔ Controlled runs and test matrix</a:t>
+            </a:r>
+          </a:p>
+        </p:txBody>
+      </p:sp>
+      <p:sp>
+        <p:nvSpPr>
+          <p:cNvPr id="47" name="Rounded Rectangle 46"/>
+          <p:cNvSpPr/>
+          <p:nvPr/>
+        </p:nvSpPr>
+        <p:spPr>
+          <a:xfrm>
+            <a:off x="4270248" y="4306824"/>
+            <a:ext cx="3666744" cy="667512"/>
+          </a:xfrm>
+          <a:prstGeom prst="roundRect">
+            <a:avLst>
+              <a:gd name="adj" fmla="val 8000"/>
+            </a:avLst>
+          </a:prstGeom>
+          <a:solidFill>
+            <a:srgbClr val="FFFFFF"/>
+          </a:solidFill>
+          <a:ln>
+            <a:solidFill>
+              <a:srgbClr val="C7DBEA"/>
+            </a:solidFill>
+          </a:ln>
+        </p:spPr>
+        <p:style>
+          <a:lnRef idx="1">
+            <a:schemeClr val="accent1"/>
+          </a:lnRef>
+          <a:fillRef idx="3">
+            <a:schemeClr val="accent1"/>
+          </a:fillRef>
+          <a:effectRef idx="2">
+            <a:schemeClr val="accent1"/>
+          </a:effectRef>
+          <a:fontRef idx="minor">
+            <a:schemeClr val="lt1"/>
+          </a:fontRef>
+        </p:style>
+        <p:txBody>
+          <a:bodyPr rtlCol="0" anchor="ctr"/>
+          <a:lstStyle/>
+          <a:p>
+            <a:pPr algn="ctr"/>
+          </a:p>
+        </p:txBody>
+      </p:sp>
+      <p:sp>
+        <p:nvSpPr>
+          <p:cNvPr id="48" name="TextBox 47"/>
+          <p:cNvSpPr txBox="1"/>
+          <p:nvPr/>
+        </p:nvSpPr>
+        <p:spPr>
+          <a:xfrm>
+            <a:off x="4361688" y="4352544"/>
+            <a:ext cx="1188720" cy="219456"/>
+          </a:xfrm>
+          <a:prstGeom prst="rect">
+            <a:avLst/>
+          </a:prstGeom>
+          <a:noFill/>
+        </p:spPr>
+        <p:txBody>
+          <a:bodyPr wrap="square" lIns="45720" rIns="45720" tIns="18288" bIns="18288" anchor="ctr">
+            <a:spAutoFit/>
+          </a:bodyPr>
+          <a:lstStyle/>
+          <a:p>
+            <a:pPr algn="ctr">
+              <a:spcAft>
+                <a:spcPts val="0"/>
+              </a:spcAft>
+            </a:pPr>
+            <a:r>
+              <a:rPr sz="1000" b="1" i="0">
+                <a:solidFill>
+                  <a:srgbClr val="153964"/>
+                </a:solidFill>
+                <a:latin typeface="Aptos"/>
+              </a:rPr>
+              <a:t>RESULTS</a:t>
+            </a:r>
+          </a:p>
+        </p:txBody>
+      </p:sp>
+      <p:sp>
+        <p:nvSpPr>
+          <p:cNvPr id="49" name="TextBox 48"/>
+          <p:cNvSpPr txBox="1"/>
+          <p:nvPr/>
+        </p:nvSpPr>
+        <p:spPr>
+          <a:xfrm>
+            <a:off x="5586983" y="4334256"/>
+            <a:ext cx="365760" cy="256032"/>
+          </a:xfrm>
+          <a:prstGeom prst="rect">
+            <a:avLst/>
+          </a:prstGeom>
+          <a:noFill/>
+        </p:spPr>
+        <p:txBody>
+          <a:bodyPr wrap="square" lIns="45720" rIns="45720" tIns="18288" bIns="18288" anchor="ctr">
+            <a:spAutoFit/>
+          </a:bodyPr>
+          <a:lstStyle/>
+          <a:p>
+            <a:pPr algn="ctr">
+              <a:spcAft>
+                <a:spcPts val="0"/>
+              </a:spcAft>
+            </a:pPr>
+            <a:r>
+              <a:rPr sz="2200" b="1" i="0">
+                <a:solidFill>
+                  <a:srgbClr val="285B91"/>
+                </a:solidFill>
+                <a:latin typeface="Aptos"/>
+              </a:rPr>
+              <a:t>↔</a:t>
+            </a:r>
+          </a:p>
+        </p:txBody>
+      </p:sp>
+      <p:sp>
+        <p:nvSpPr>
+          <p:cNvPr id="50" name="TextBox 49"/>
+          <p:cNvSpPr txBox="1"/>
+          <p:nvPr/>
+        </p:nvSpPr>
+        <p:spPr>
+          <a:xfrm>
+            <a:off x="5971031" y="4352544"/>
+            <a:ext cx="1783080" cy="219456"/>
+          </a:xfrm>
+          <a:prstGeom prst="rect">
+            <a:avLst/>
+          </a:prstGeom>
+          <a:noFill/>
+        </p:spPr>
+        <p:txBody>
+          <a:bodyPr wrap="square" lIns="45720" rIns="45720" tIns="18288" bIns="18288" anchor="ctr">
+            <a:spAutoFit/>
+          </a:bodyPr>
+          <a:lstStyle/>
+          <a:p>
+            <a:pPr algn="ctr">
+              <a:spcAft>
+                <a:spcPts val="0"/>
+              </a:spcAft>
+            </a:pPr>
+            <a:r>
+              <a:rPr sz="950" b="1" i="0">
+                <a:solidFill>
+                  <a:srgbClr val="153964"/>
+                </a:solidFill>
+                <a:latin typeface="Aptos"/>
+              </a:rPr>
+              <a:t>DATA ANALYSIS</a:t>
+            </a:r>
+          </a:p>
+        </p:txBody>
+      </p:sp>
+      <p:sp>
+        <p:nvSpPr>
+          <p:cNvPr id="51" name="TextBox 50"/>
+          <p:cNvSpPr txBox="1"/>
+          <p:nvPr/>
+        </p:nvSpPr>
+        <p:spPr>
+          <a:xfrm>
+            <a:off x="4343400" y="4599432"/>
+            <a:ext cx="3520440" cy="283464"/>
+          </a:xfrm>
+          <a:prstGeom prst="rect">
+            <a:avLst/>
+          </a:prstGeom>
+          <a:noFill/>
+        </p:spPr>
+        <p:txBody>
+          <a:bodyPr wrap="square" lIns="45720" rIns="45720" tIns="18288" bIns="18288" anchor="ctr">
+            <a:spAutoFit/>
+          </a:bodyPr>
+          <a:lstStyle/>
+          <a:p>
+            <a:pPr algn="ctr">
+              <a:spcAft>
+                <a:spcPts val="0"/>
+              </a:spcAft>
+            </a:pPr>
+            <a:r>
+              <a:rPr sz="919" b="0" i="0">
+                <a:solidFill>
+                  <a:srgbClr val="4D677F"/>
+                </a:solidFill>
+                <a:latin typeface="Aptos"/>
+              </a:rPr>
+              <a:t>Compare measured values ↔ Estimate effects and interactions</a:t>
+            </a:r>
+          </a:p>
+        </p:txBody>
+      </p:sp>
+      <p:sp>
+        <p:nvSpPr>
+          <p:cNvPr id="52" name="Rounded Rectangle 51"/>
+          <p:cNvSpPr/>
+          <p:nvPr/>
+        </p:nvSpPr>
+        <p:spPr>
+          <a:xfrm>
+            <a:off x="4270248" y="5020056"/>
+            <a:ext cx="3666744" cy="667512"/>
+          </a:xfrm>
+          <a:prstGeom prst="roundRect">
+            <a:avLst>
+              <a:gd name="adj" fmla="val 8000"/>
+            </a:avLst>
+          </a:prstGeom>
+          <a:solidFill>
+            <a:srgbClr val="FFFFFF"/>
+          </a:solidFill>
+          <a:ln>
+            <a:solidFill>
+              <a:srgbClr val="C7DBEA"/>
+            </a:solidFill>
+          </a:ln>
+        </p:spPr>
+        <p:style>
+          <a:lnRef idx="1">
+            <a:schemeClr val="accent1"/>
+          </a:lnRef>
+          <a:fillRef idx="3">
+            <a:schemeClr val="accent1"/>
+          </a:fillRef>
+          <a:effectRef idx="2">
+            <a:schemeClr val="accent1"/>
+          </a:effectRef>
+          <a:fontRef idx="minor">
+            <a:schemeClr val="lt1"/>
+          </a:fontRef>
+        </p:style>
+        <p:txBody>
+          <a:bodyPr rtlCol="0" anchor="ctr"/>
+          <a:lstStyle/>
+          <a:p>
+            <a:pPr algn="ctr"/>
+          </a:p>
+        </p:txBody>
+      </p:sp>
+      <p:sp>
+        <p:nvSpPr>
+          <p:cNvPr id="53" name="TextBox 52"/>
+          <p:cNvSpPr txBox="1"/>
+          <p:nvPr/>
+        </p:nvSpPr>
+        <p:spPr>
+          <a:xfrm>
+            <a:off x="4361688" y="5065776"/>
+            <a:ext cx="1188720" cy="219456"/>
+          </a:xfrm>
+          <a:prstGeom prst="rect">
+            <a:avLst/>
+          </a:prstGeom>
+          <a:noFill/>
+        </p:spPr>
+        <p:txBody>
+          <a:bodyPr wrap="square" lIns="45720" rIns="45720" tIns="18288" bIns="18288" anchor="ctr">
+            <a:spAutoFit/>
+          </a:bodyPr>
+          <a:lstStyle/>
+          <a:p>
+            <a:pPr algn="ctr">
+              <a:spcAft>
+                <a:spcPts val="0"/>
+              </a:spcAft>
+            </a:pPr>
+            <a:r>
+              <a:rPr sz="1000" b="1" i="0">
+                <a:solidFill>
+                  <a:srgbClr val="153964"/>
+                </a:solidFill>
+                <a:latin typeface="Aptos"/>
+              </a:rPr>
+              <a:t>WINNER</a:t>
+            </a:r>
+          </a:p>
+        </p:txBody>
+      </p:sp>
+      <p:sp>
+        <p:nvSpPr>
+          <p:cNvPr id="54" name="TextBox 53"/>
+          <p:cNvSpPr txBox="1"/>
+          <p:nvPr/>
+        </p:nvSpPr>
+        <p:spPr>
+          <a:xfrm>
+            <a:off x="5586983" y="5047488"/>
+            <a:ext cx="365760" cy="256032"/>
+          </a:xfrm>
+          <a:prstGeom prst="rect">
+            <a:avLst/>
+          </a:prstGeom>
+          <a:noFill/>
+        </p:spPr>
+        <p:txBody>
+          <a:bodyPr wrap="square" lIns="45720" rIns="45720" tIns="18288" bIns="18288" anchor="ctr">
+            <a:spAutoFit/>
+          </a:bodyPr>
+          <a:lstStyle/>
+          <a:p>
+            <a:pPr algn="ctr">
+              <a:spcAft>
+                <a:spcPts val="0"/>
+              </a:spcAft>
+            </a:pPr>
+            <a:r>
+              <a:rPr sz="2200" b="1" i="0">
+                <a:solidFill>
+                  <a:srgbClr val="285B91"/>
+                </a:solidFill>
+                <a:latin typeface="Aptos"/>
+              </a:rPr>
+              <a:t>↔</a:t>
+            </a:r>
+          </a:p>
+        </p:txBody>
+      </p:sp>
+      <p:sp>
+        <p:nvSpPr>
+          <p:cNvPr id="55" name="TextBox 54"/>
+          <p:cNvSpPr txBox="1"/>
+          <p:nvPr/>
+        </p:nvSpPr>
+        <p:spPr>
+          <a:xfrm>
+            <a:off x="5971031" y="5065776"/>
+            <a:ext cx="1783080" cy="219456"/>
+          </a:xfrm>
+          <a:prstGeom prst="rect">
+            <a:avLst/>
+          </a:prstGeom>
+          <a:noFill/>
+        </p:spPr>
+        <p:txBody>
+          <a:bodyPr wrap="square" lIns="45720" rIns="45720" tIns="18288" bIns="18288" anchor="ctr">
+            <a:spAutoFit/>
+          </a:bodyPr>
+          <a:lstStyle/>
+          <a:p>
+            <a:pPr algn="ctr">
+              <a:spcAft>
+                <a:spcPts val="0"/>
+              </a:spcAft>
+            </a:pPr>
+            <a:r>
+              <a:rPr sz="950" b="1" i="0">
+                <a:solidFill>
+                  <a:srgbClr val="153964"/>
+                </a:solidFill>
+                <a:latin typeface="Aptos"/>
+              </a:rPr>
+              <a:t>OPTIMUM</a:t>
+            </a:r>
+          </a:p>
+        </p:txBody>
+      </p:sp>
+      <p:sp>
+        <p:nvSpPr>
+          <p:cNvPr id="56" name="TextBox 55"/>
+          <p:cNvSpPr txBox="1"/>
+          <p:nvPr/>
+        </p:nvSpPr>
+        <p:spPr>
+          <a:xfrm>
+            <a:off x="4343400" y="5312664"/>
+            <a:ext cx="3520440" cy="283464"/>
+          </a:xfrm>
+          <a:prstGeom prst="rect">
+            <a:avLst/>
+          </a:prstGeom>
+          <a:noFill/>
+        </p:spPr>
+        <p:txBody>
+          <a:bodyPr wrap="square" lIns="45720" rIns="45720" tIns="18288" bIns="18288" anchor="ctr">
+            <a:spAutoFit/>
+          </a:bodyPr>
+          <a:lstStyle/>
+          <a:p>
+            <a:pPr algn="ctr">
+              <a:spcAft>
+                <a:spcPts val="0"/>
+              </a:spcAft>
+            </a:pPr>
+            <a:r>
+              <a:rPr sz="919" b="0" i="0">
+                <a:solidFill>
+                  <a:srgbClr val="4D677F"/>
+                </a:solidFill>
+                <a:latin typeface="Aptos"/>
+              </a:rPr>
+              <a:t>Best product for the test ↔ Best settings for the objective</a:t>
+            </a:r>
+          </a:p>
+        </p:txBody>
+      </p:sp>
+      <p:sp>
+        <p:nvSpPr>
+          <p:cNvPr id="57" name="Rounded Rectangle 56"/>
+          <p:cNvSpPr/>
+          <p:nvPr/>
+        </p:nvSpPr>
+        <p:spPr>
+          <a:xfrm>
+            <a:off x="8129016" y="1517904"/>
+            <a:ext cx="3886200" cy="530352"/>
+          </a:xfrm>
+          <a:prstGeom prst="roundRect">
+            <a:avLst>
+              <a:gd name="adj" fmla="val 8000"/>
+            </a:avLst>
+          </a:prstGeom>
+          <a:solidFill>
+            <a:srgbClr val="0F3053"/>
+          </a:solidFill>
+          <a:ln>
+            <a:solidFill>
+              <a:srgbClr val="0F3053"/>
+            </a:solidFill>
+          </a:ln>
+        </p:spPr>
+        <p:style>
+          <a:lnRef idx="1">
+            <a:schemeClr val="accent1"/>
+          </a:lnRef>
+          <a:fillRef idx="3">
+            <a:schemeClr val="accent1"/>
+          </a:fillRef>
+          <a:effectRef idx="2">
+            <a:schemeClr val="accent1"/>
+          </a:effectRef>
+          <a:fontRef idx="minor">
+            <a:schemeClr val="lt1"/>
+          </a:fontRef>
+        </p:style>
+        <p:txBody>
+          <a:bodyPr rtlCol="0" anchor="ctr"/>
+          <a:lstStyle/>
+          <a:p>
+            <a:pPr algn="ctr"/>
+          </a:p>
+        </p:txBody>
+      </p:sp>
+      <p:sp>
+        <p:nvSpPr>
+          <p:cNvPr id="58" name="TextBox 57"/>
+          <p:cNvSpPr txBox="1"/>
+          <p:nvPr/>
+        </p:nvSpPr>
+        <p:spPr>
+          <a:xfrm>
+            <a:off x="8220456" y="1545336"/>
+            <a:ext cx="3703320" cy="274320"/>
+          </a:xfrm>
+          <a:prstGeom prst="rect">
+            <a:avLst/>
+          </a:prstGeom>
+          <a:noFill/>
+        </p:spPr>
+        <p:txBody>
+          <a:bodyPr wrap="square" lIns="45720" rIns="45720" tIns="18288" bIns="18288" anchor="ctr">
+            <a:spAutoFit/>
+          </a:bodyPr>
+          <a:lstStyle/>
+          <a:p>
+            <a:pPr algn="ctr">
+              <a:spcAft>
+                <a:spcPts val="0"/>
+              </a:spcAft>
+            </a:pPr>
+            <a:r>
+              <a:rPr sz="1700" b="1" i="0">
+                <a:solidFill>
+                  <a:srgbClr val="FFFFFF"/>
+                </a:solidFill>
+                <a:latin typeface="Aptos"/>
+              </a:rPr>
+              <a:t>Design of Experiments (DoE)</a:t>
+            </a:r>
+          </a:p>
+        </p:txBody>
+      </p:sp>
+      <p:sp>
+        <p:nvSpPr>
+          <p:cNvPr id="59" name="TextBox 58"/>
+          <p:cNvSpPr txBox="1"/>
+          <p:nvPr/>
+        </p:nvSpPr>
+        <p:spPr>
+          <a:xfrm>
+            <a:off x="8220456" y="1801368"/>
+            <a:ext cx="3703320" cy="182880"/>
+          </a:xfrm>
+          <a:prstGeom prst="rect">
+            <a:avLst/>
+          </a:prstGeom>
+          <a:noFill/>
+        </p:spPr>
+        <p:txBody>
+          <a:bodyPr wrap="square" lIns="45720" rIns="45720" tIns="18288" bIns="18288" anchor="ctr">
+            <a:spAutoFit/>
+          </a:bodyPr>
+          <a:lstStyle/>
+          <a:p>
+            <a:pPr algn="ctr">
+              <a:spcAft>
+                <a:spcPts val="0"/>
+              </a:spcAft>
+            </a:pPr>
+            <a:r>
+              <a:rPr sz="1000" b="0" i="0">
+                <a:solidFill>
+                  <a:srgbClr val="FFFFFF"/>
+                </a:solidFill>
+                <a:latin typeface="Aptos"/>
+              </a:rPr>
+              <a:t>Statistical methodology</a:t>
+            </a:r>
+          </a:p>
+        </p:txBody>
+      </p:sp>
+      <p:sp>
+        <p:nvSpPr>
+          <p:cNvPr id="60" name="TextBox 59"/>
+          <p:cNvSpPr txBox="1"/>
+          <p:nvPr/>
+        </p:nvSpPr>
+        <p:spPr>
+          <a:xfrm>
+            <a:off x="8293608" y="2103120"/>
+            <a:ext cx="1417320" cy="228600"/>
+          </a:xfrm>
+          <a:prstGeom prst="rect">
+            <a:avLst/>
+          </a:prstGeom>
+          <a:noFill/>
+        </p:spPr>
+        <p:txBody>
+          <a:bodyPr wrap="square" lIns="45720" rIns="45720" tIns="18288" bIns="18288" anchor="ctr">
+            <a:spAutoFit/>
+          </a:bodyPr>
+          <a:lstStyle/>
+          <a:p>
+            <a:pPr algn="ctr">
+              <a:spcAft>
+                <a:spcPts val="0"/>
+              </a:spcAft>
+            </a:pPr>
+            <a:r>
+              <a:rPr sz="1000" b="1" i="0">
+                <a:solidFill>
+                  <a:srgbClr val="153964"/>
+                </a:solidFill>
+                <a:latin typeface="Aptos"/>
+              </a:rPr>
+              <a:t>Example test matrix</a:t>
+            </a:r>
+          </a:p>
+        </p:txBody>
+      </p:sp>
+      <p:graphicFrame>
+        <p:nvGraphicFramePr>
+          <p:cNvPr id="61" name="Table 60"/>
+          <p:cNvGraphicFramePr>
+            <a:graphicFrameLocks noGrp="1"/>
+          </p:cNvGraphicFramePr>
+          <p:nvPr/>
+        </p:nvGraphicFramePr>
+        <p:xfrm>
+          <a:off x="8293608" y="2340864"/>
+          <a:ext cx="1600200" cy="960120"/>
+        </p:xfrm>
+        <a:graphic>
+          <a:graphicData uri="http://schemas.openxmlformats.org/drawingml/2006/table">
+            <a:tbl>
+              <a:tblPr firstRow="1" bandRow="1">
+                <a:tableStyleId>{5C22544A-7EE6-4342-B048-85BDC9FD1C3A}</a:tableStyleId>
+              </a:tblPr>
+              <a:tblGrid>
+                <a:gridCol w="411480"/>
+                <a:gridCol w="566928"/>
+                <a:gridCol w="621792"/>
+              </a:tblGrid>
+              <a:tr h="240030">
+                <a:tc>
+                  <a:txBody>
+                    <a:bodyPr/>
+                    <a:lstStyle/>
+                    <a:p>
+                      <a:pPr algn="ctr"/>
+                      <a:r>
+                        <a:rPr sz="800" b="1">
+                          <a:solidFill>
+                            <a:srgbClr val="FFFFFF"/>
+                          </a:solidFill>
+                          <a:latin typeface="Aptos"/>
+                        </a:rPr>
+                        <a:t>Run</a:t>
+                      </a:r>
+                    </a:p>
+                  </a:txBody>
+                  <a:tcPr marL="22860" marR="22860" marT="13716" marB="13716">
+                    <a:solidFill>
+                      <a:srgbClr val="153964"/>
+                    </a:solidFill>
+                  </a:tcPr>
+                </a:tc>
+                <a:tc>
+                  <a:txBody>
+                    <a:bodyPr/>
+                    <a:lstStyle/>
+                    <a:p>
+                      <a:pPr algn="ctr"/>
+                      <a:r>
+                        <a:rPr sz="800" b="1">
+                          <a:solidFill>
+                            <a:srgbClr val="FFFFFF"/>
+                          </a:solidFill>
+                          <a:latin typeface="Aptos"/>
+                        </a:rPr>
+                        <a:t>Factor A</a:t>
+                      </a:r>
+                    </a:p>
+                  </a:txBody>
+                  <a:tcPr marL="22860" marR="22860" marT="13716" marB="13716">
+                    <a:solidFill>
+                      <a:srgbClr val="153964"/>
+                    </a:solidFill>
+                  </a:tcPr>
+                </a:tc>
+                <a:tc>
+                  <a:txBody>
+                    <a:bodyPr/>
+                    <a:lstStyle/>
+                    <a:p>
+                      <a:pPr algn="ctr"/>
+                      <a:r>
+                        <a:rPr sz="800" b="1">
+                          <a:solidFill>
+                            <a:srgbClr val="FFFFFF"/>
+                          </a:solidFill>
+                          <a:latin typeface="Aptos"/>
+                        </a:rPr>
+                        <a:t>Result</a:t>
+                      </a:r>
+                    </a:p>
+                  </a:txBody>
+                  <a:tcPr marL="22860" marR="22860" marT="13716" marB="13716">
+                    <a:solidFill>
+                      <a:srgbClr val="153964"/>
+                    </a:solidFill>
+                  </a:tcPr>
+                </a:tc>
+              </a:tr>
+              <a:tr h="240030">
+                <a:tc>
+                  <a:txBody>
+                    <a:bodyPr/>
+                    <a:lstStyle/>
+                    <a:p>
+                      <a:pPr algn="ctr"/>
+                      <a:r>
+                        <a:rPr sz="800" b="0">
+                          <a:solidFill>
+                            <a:srgbClr val="183A5B"/>
+                          </a:solidFill>
+                          <a:latin typeface="Aptos"/>
+                        </a:rPr>
+                        <a:t>1</a:t>
+                      </a:r>
+                    </a:p>
+                  </a:txBody>
+                  <a:tcPr marL="22860" marR="22860" marT="13716" marB="13716">
+                    <a:solidFill>
+                      <a:srgbClr val="FFFFFF"/>
+                    </a:solidFill>
+                  </a:tcPr>
+                </a:tc>
+                <a:tc>
+                  <a:txBody>
+                    <a:bodyPr/>
+                    <a:lstStyle/>
+                    <a:p>
+                      <a:pPr algn="ctr"/>
+                      <a:r>
+                        <a:rPr sz="800" b="0">
+                          <a:solidFill>
+                            <a:srgbClr val="183A5B"/>
+                          </a:solidFill>
+                          <a:latin typeface="Aptos"/>
+                        </a:rPr>
+                        <a:t>Low</a:t>
+                      </a:r>
+                    </a:p>
+                  </a:txBody>
+                  <a:tcPr marL="22860" marR="22860" marT="13716" marB="13716">
+                    <a:solidFill>
+                      <a:srgbClr val="FFFFFF"/>
+                    </a:solidFill>
+                  </a:tcPr>
+                </a:tc>
+                <a:tc>
+                  <a:txBody>
+                    <a:bodyPr/>
+                    <a:lstStyle/>
+                    <a:p>
+                      <a:pPr algn="ctr"/>
+                      <a:r>
+                        <a:rPr sz="800" b="0">
+                          <a:solidFill>
+                            <a:srgbClr val="183A5B"/>
+                          </a:solidFill>
+                          <a:latin typeface="Aptos"/>
+                        </a:rPr>
+                        <a:t>42</a:t>
+                      </a:r>
+                    </a:p>
+                  </a:txBody>
+                  <a:tcPr marL="22860" marR="22860" marT="13716" marB="13716">
+                    <a:solidFill>
+                      <a:srgbClr val="FFFFFF"/>
+                    </a:solidFill>
+                  </a:tcPr>
+                </a:tc>
+              </a:tr>
+              <a:tr h="240030">
+                <a:tc>
+                  <a:txBody>
+                    <a:bodyPr/>
+                    <a:lstStyle/>
+                    <a:p>
+                      <a:pPr algn="ctr"/>
+                      <a:r>
+                        <a:rPr sz="800" b="0">
+                          <a:solidFill>
+                            <a:srgbClr val="183A5B"/>
+                          </a:solidFill>
+                          <a:latin typeface="Aptos"/>
+                        </a:rPr>
+                        <a:t>2</a:t>
+                      </a:r>
+                    </a:p>
+                  </a:txBody>
+                  <a:tcPr marL="22860" marR="22860" marT="13716" marB="13716">
+                    <a:solidFill>
+                      <a:srgbClr val="FFFFFF"/>
+                    </a:solidFill>
+                  </a:tcPr>
+                </a:tc>
+                <a:tc>
+                  <a:txBody>
+                    <a:bodyPr/>
+                    <a:lstStyle/>
+                    <a:p>
+                      <a:pPr algn="ctr"/>
+                      <a:r>
+                        <a:rPr sz="800" b="0">
+                          <a:solidFill>
+                            <a:srgbClr val="183A5B"/>
+                          </a:solidFill>
+                          <a:latin typeface="Aptos"/>
+                        </a:rPr>
+                        <a:t>High</a:t>
+                      </a:r>
+                    </a:p>
+                  </a:txBody>
+                  <a:tcPr marL="22860" marR="22860" marT="13716" marB="13716">
+                    <a:solidFill>
+                      <a:srgbClr val="FFFFFF"/>
+                    </a:solidFill>
+                  </a:tcPr>
+                </a:tc>
+                <a:tc>
+                  <a:txBody>
+                    <a:bodyPr/>
+                    <a:lstStyle/>
+                    <a:p>
+                      <a:pPr algn="ctr"/>
+                      <a:r>
+                        <a:rPr sz="800" b="0">
+                          <a:solidFill>
+                            <a:srgbClr val="183A5B"/>
+                          </a:solidFill>
+                          <a:latin typeface="Aptos"/>
+                        </a:rPr>
+                        <a:t>68</a:t>
+                      </a:r>
+                    </a:p>
+                  </a:txBody>
+                  <a:tcPr marL="22860" marR="22860" marT="13716" marB="13716">
+                    <a:solidFill>
+                      <a:srgbClr val="FFFFFF"/>
+                    </a:solidFill>
+                  </a:tcPr>
+                </a:tc>
+              </a:tr>
+              <a:tr h="240030">
+                <a:tc>
+                  <a:txBody>
+                    <a:bodyPr/>
+                    <a:lstStyle/>
+                    <a:p>
+                      <a:pPr algn="ctr"/>
+                      <a:r>
+                        <a:rPr sz="800" b="0">
+                          <a:solidFill>
+                            <a:srgbClr val="183A5B"/>
+                          </a:solidFill>
+                          <a:latin typeface="Aptos"/>
+                        </a:rPr>
+                        <a:t>3</a:t>
+                      </a:r>
+                    </a:p>
+                  </a:txBody>
+                  <a:tcPr marL="22860" marR="22860" marT="13716" marB="13716">
+                    <a:solidFill>
+                      <a:srgbClr val="FFFFFF"/>
+                    </a:solidFill>
+                  </a:tcPr>
+                </a:tc>
+                <a:tc>
+                  <a:txBody>
+                    <a:bodyPr/>
+                    <a:lstStyle/>
+                    <a:p>
+                      <a:pPr algn="ctr"/>
+                      <a:r>
+                        <a:rPr sz="800" b="0">
+                          <a:solidFill>
+                            <a:srgbClr val="183A5B"/>
+                          </a:solidFill>
+                          <a:latin typeface="Aptos"/>
+                        </a:rPr>
+                        <a:t>High</a:t>
+                      </a:r>
+                    </a:p>
+                  </a:txBody>
+                  <a:tcPr marL="22860" marR="22860" marT="13716" marB="13716">
+                    <a:solidFill>
+                      <a:srgbClr val="FFFFFF"/>
+                    </a:solidFill>
+                  </a:tcPr>
+                </a:tc>
+                <a:tc>
+                  <a:txBody>
+                    <a:bodyPr/>
+                    <a:lstStyle/>
+                    <a:p>
+                      <a:pPr algn="ctr"/>
+                      <a:r>
+                        <a:rPr sz="800" b="0">
+                          <a:solidFill>
+                            <a:srgbClr val="183A5B"/>
+                          </a:solidFill>
+                          <a:latin typeface="Aptos"/>
+                        </a:rPr>
+                        <a:t>82</a:t>
+                      </a:r>
+                    </a:p>
+                  </a:txBody>
+                  <a:tcPr marL="22860" marR="22860" marT="13716" marB="13716">
+                    <a:solidFill>
+                      <a:srgbClr val="FFFFFF"/>
+                    </a:solidFill>
+                  </a:tcPr>
+                </a:tc>
+              </a:tr>
+            </a:tbl>
+          </a:graphicData>
+        </a:graphic>
+      </p:graphicFrame>
+      <p:sp>
+        <p:nvSpPr>
+          <p:cNvPr id="62" name="TextBox 61"/>
+          <p:cNvSpPr txBox="1"/>
+          <p:nvPr/>
+        </p:nvSpPr>
+        <p:spPr>
+          <a:xfrm>
+            <a:off x="10012680" y="2103120"/>
+            <a:ext cx="1783080" cy="228600"/>
+          </a:xfrm>
+          <a:prstGeom prst="rect">
+            <a:avLst/>
+          </a:prstGeom>
+          <a:noFill/>
+        </p:spPr>
+        <p:txBody>
+          <a:bodyPr wrap="square" lIns="45720" rIns="45720" tIns="18288" bIns="18288" anchor="ctr">
+            <a:spAutoFit/>
+          </a:bodyPr>
+          <a:lstStyle/>
+          <a:p>
+            <a:pPr algn="ctr">
+              <a:spcAft>
+                <a:spcPts val="0"/>
+              </a:spcAft>
+            </a:pPr>
+            <a:r>
+              <a:rPr sz="1000" b="1" i="0">
+                <a:solidFill>
+                  <a:srgbClr val="153964"/>
+                </a:solidFill>
+                <a:latin typeface="Aptos"/>
+              </a:rPr>
+              <a:t>Factors → response</a:t>
+            </a:r>
+          </a:p>
+        </p:txBody>
+      </p:sp>
+      <p:cxnSp>
+        <p:nvCxnSpPr>
+          <p:cNvPr id="63" name="Connector 62"/>
+          <p:cNvCxnSpPr/>
+          <p:nvPr/>
+        </p:nvCxnSpPr>
+        <p:spPr>
+          <a:xfrm flipV="1">
+            <a:off x="10158984" y="2450592"/>
+            <a:ext cx="0" cy="768096"/>
+          </a:xfrm>
+          <a:prstGeom prst="line">
+            <a:avLst/>
+          </a:prstGeom>
+          <a:ln>
+            <a:solidFill>
+              <a:srgbClr val="285B91"/>
+            </a:solidFill>
+          </a:ln>
+        </p:spPr>
+        <p:style>
+          <a:lnRef idx="2">
+            <a:schemeClr val="accent1"/>
+          </a:lnRef>
+          <a:fillRef idx="0">
+            <a:schemeClr val="accent1"/>
+          </a:fillRef>
+          <a:effectRef idx="1">
+            <a:schemeClr val="accent1"/>
+          </a:effectRef>
+          <a:fontRef idx="minor">
+            <a:schemeClr val="tx1"/>
+          </a:fontRef>
+        </p:style>
+      </p:cxnSp>
+      <p:cxnSp>
+        <p:nvCxnSpPr>
+          <p:cNvPr id="64" name="Connector 63"/>
+          <p:cNvCxnSpPr/>
+          <p:nvPr/>
+        </p:nvCxnSpPr>
+        <p:spPr>
+          <a:xfrm>
+            <a:off x="10158984" y="3218688"/>
+            <a:ext cx="1581912" cy="0"/>
+          </a:xfrm>
+          <a:prstGeom prst="line">
+            <a:avLst/>
+          </a:prstGeom>
+          <a:ln>
+            <a:solidFill>
+              <a:srgbClr val="285B91"/>
+            </a:solidFill>
+          </a:ln>
+        </p:spPr>
+        <p:style>
+          <a:lnRef idx="2">
+            <a:schemeClr val="accent1"/>
+          </a:lnRef>
+          <a:fillRef idx="0">
+            <a:schemeClr val="accent1"/>
+          </a:fillRef>
+          <a:effectRef idx="1">
+            <a:schemeClr val="accent1"/>
+          </a:effectRef>
+          <a:fontRef idx="minor">
+            <a:schemeClr val="tx1"/>
+          </a:fontRef>
+        </p:style>
+      </p:cxnSp>
+      <p:cxnSp>
+        <p:nvCxnSpPr>
+          <p:cNvPr id="65" name="Connector 64"/>
+          <p:cNvCxnSpPr/>
+          <p:nvPr/>
+        </p:nvCxnSpPr>
+        <p:spPr>
+          <a:xfrm flipV="1">
+            <a:off x="10277856" y="2944368"/>
+            <a:ext cx="365760" cy="128016"/>
+          </a:xfrm>
+          <a:prstGeom prst="line">
+            <a:avLst/>
+          </a:prstGeom>
+          <a:ln w="31750">
+            <a:solidFill>
+              <a:srgbClr val="249653"/>
+            </a:solidFill>
+          </a:ln>
+        </p:spPr>
+        <p:style>
+          <a:lnRef idx="2">
+            <a:schemeClr val="accent1"/>
+          </a:lnRef>
+          <a:fillRef idx="0">
+            <a:schemeClr val="accent1"/>
+          </a:fillRef>
+          <a:effectRef idx="1">
+            <a:schemeClr val="accent1"/>
+          </a:effectRef>
+          <a:fontRef idx="minor">
+            <a:schemeClr val="tx1"/>
+          </a:fontRef>
+        </p:style>
+      </p:cxnSp>
+      <p:cxnSp>
+        <p:nvCxnSpPr>
+          <p:cNvPr id="66" name="Connector 65"/>
+          <p:cNvCxnSpPr/>
+          <p:nvPr/>
+        </p:nvCxnSpPr>
+        <p:spPr>
+          <a:xfrm flipV="1">
+            <a:off x="10643616" y="2788920"/>
+            <a:ext cx="338328" cy="155448"/>
+          </a:xfrm>
+          <a:prstGeom prst="line">
+            <a:avLst/>
+          </a:prstGeom>
+          <a:ln w="31750">
+            <a:solidFill>
+              <a:srgbClr val="249653"/>
+            </a:solidFill>
+          </a:ln>
+        </p:spPr>
+        <p:style>
+          <a:lnRef idx="2">
+            <a:schemeClr val="accent1"/>
+          </a:lnRef>
+          <a:fillRef idx="0">
+            <a:schemeClr val="accent1"/>
+          </a:fillRef>
+          <a:effectRef idx="1">
+            <a:schemeClr val="accent1"/>
+          </a:effectRef>
+          <a:fontRef idx="minor">
+            <a:schemeClr val="tx1"/>
+          </a:fontRef>
+        </p:style>
+      </p:cxnSp>
+      <p:cxnSp>
+        <p:nvCxnSpPr>
+          <p:cNvPr id="67" name="Connector 66"/>
+          <p:cNvCxnSpPr/>
+          <p:nvPr/>
+        </p:nvCxnSpPr>
+        <p:spPr>
+          <a:xfrm flipV="1">
+            <a:off x="10981944" y="2542032"/>
+            <a:ext cx="393192" cy="246888"/>
+          </a:xfrm>
+          <a:prstGeom prst="line">
+            <a:avLst/>
+          </a:prstGeom>
+          <a:ln w="31750">
+            <a:solidFill>
+              <a:srgbClr val="249653"/>
+            </a:solidFill>
+          </a:ln>
+        </p:spPr>
+        <p:style>
+          <a:lnRef idx="2">
+            <a:schemeClr val="accent1"/>
+          </a:lnRef>
+          <a:fillRef idx="0">
+            <a:schemeClr val="accent1"/>
+          </a:fillRef>
+          <a:effectRef idx="1">
+            <a:schemeClr val="accent1"/>
+          </a:effectRef>
+          <a:fontRef idx="minor">
+            <a:schemeClr val="tx1"/>
+          </a:fontRef>
+        </p:style>
+      </p:cxnSp>
+      <p:cxnSp>
+        <p:nvCxnSpPr>
+          <p:cNvPr id="68" name="Connector 67"/>
+          <p:cNvCxnSpPr/>
+          <p:nvPr/>
+        </p:nvCxnSpPr>
+        <p:spPr>
+          <a:xfrm>
+            <a:off x="11375136" y="2542032"/>
+            <a:ext cx="292608" cy="45720"/>
+          </a:xfrm>
+          <a:prstGeom prst="line">
+            <a:avLst/>
+          </a:prstGeom>
+          <a:ln w="31750">
+            <a:solidFill>
+              <a:srgbClr val="249653"/>
+            </a:solidFill>
+          </a:ln>
+        </p:spPr>
+        <p:style>
+          <a:lnRef idx="2">
+            <a:schemeClr val="accent1"/>
+          </a:lnRef>
+          <a:fillRef idx="0">
+            <a:schemeClr val="accent1"/>
+          </a:fillRef>
+          <a:effectRef idx="1">
+            <a:schemeClr val="accent1"/>
+          </a:effectRef>
+          <a:fontRef idx="minor">
+            <a:schemeClr val="tx1"/>
+          </a:fontRef>
+        </p:style>
+      </p:cxnSp>
+      <p:sp>
+        <p:nvSpPr>
+          <p:cNvPr id="69" name="Oval 68"/>
+          <p:cNvSpPr/>
+          <p:nvPr/>
+        </p:nvSpPr>
+        <p:spPr>
+          <a:xfrm>
+            <a:off x="10245852" y="3040379"/>
+            <a:ext cx="64008" cy="64008"/>
+          </a:xfrm>
+          <a:prstGeom prst="ellipse">
+            <a:avLst/>
+          </a:prstGeom>
+          <a:solidFill>
+            <a:srgbClr val="249653"/>
+          </a:solidFill>
+          <a:ln>
+            <a:solidFill>
+              <a:srgbClr val="249653"/>
+            </a:solidFill>
+          </a:ln>
+        </p:spPr>
+        <p:style>
+          <a:lnRef idx="1">
+            <a:schemeClr val="accent1"/>
+          </a:lnRef>
+          <a:fillRef idx="3">
+            <a:schemeClr val="accent1"/>
+          </a:fillRef>
+          <a:effectRef idx="2">
+            <a:schemeClr val="accent1"/>
+          </a:effectRef>
+          <a:fontRef idx="minor">
+            <a:schemeClr val="lt1"/>
+          </a:fontRef>
+        </p:style>
+        <p:txBody>
+          <a:bodyPr rtlCol="0" anchor="ctr"/>
+          <a:lstStyle/>
+          <a:p>
+            <a:pPr algn="ctr"/>
+          </a:p>
+        </p:txBody>
+      </p:sp>
+      <p:sp>
+        <p:nvSpPr>
+          <p:cNvPr id="70" name="Oval 69"/>
+          <p:cNvSpPr/>
+          <p:nvPr/>
+        </p:nvSpPr>
+        <p:spPr>
+          <a:xfrm>
+            <a:off x="10611612" y="2912364"/>
+            <a:ext cx="64008" cy="64008"/>
+          </a:xfrm>
+          <a:prstGeom prst="ellipse">
+            <a:avLst/>
+          </a:prstGeom>
+          <a:solidFill>
+            <a:srgbClr val="249653"/>
+          </a:solidFill>
+          <a:ln>
+            <a:solidFill>
+              <a:srgbClr val="249653"/>
+            </a:solidFill>
+          </a:ln>
+        </p:spPr>
+        <p:style>
+          <a:lnRef idx="1">
+            <a:schemeClr val="accent1"/>
+          </a:lnRef>
+          <a:fillRef idx="3">
+            <a:schemeClr val="accent1"/>
+          </a:fillRef>
+          <a:effectRef idx="2">
+            <a:schemeClr val="accent1"/>
+          </a:effectRef>
+          <a:fontRef idx="minor">
+            <a:schemeClr val="lt1"/>
+          </a:fontRef>
+        </p:style>
+        <p:txBody>
+          <a:bodyPr rtlCol="0" anchor="ctr"/>
+          <a:lstStyle/>
+          <a:p>
+            <a:pPr algn="ctr"/>
+          </a:p>
+        </p:txBody>
+      </p:sp>
+      <p:sp>
+        <p:nvSpPr>
+          <p:cNvPr id="71" name="Oval 70"/>
+          <p:cNvSpPr/>
+          <p:nvPr/>
+        </p:nvSpPr>
+        <p:spPr>
+          <a:xfrm>
+            <a:off x="10949940" y="2756915"/>
+            <a:ext cx="64008" cy="64008"/>
+          </a:xfrm>
+          <a:prstGeom prst="ellipse">
+            <a:avLst/>
+          </a:prstGeom>
+          <a:solidFill>
+            <a:srgbClr val="249653"/>
+          </a:solidFill>
+          <a:ln>
+            <a:solidFill>
+              <a:srgbClr val="249653"/>
+            </a:solidFill>
+          </a:ln>
+        </p:spPr>
+        <p:style>
+          <a:lnRef idx="1">
+            <a:schemeClr val="accent1"/>
+          </a:lnRef>
+          <a:fillRef idx="3">
+            <a:schemeClr val="accent1"/>
+          </a:fillRef>
+          <a:effectRef idx="2">
+            <a:schemeClr val="accent1"/>
+          </a:effectRef>
+          <a:fontRef idx="minor">
+            <a:schemeClr val="lt1"/>
+          </a:fontRef>
+        </p:style>
+        <p:txBody>
+          <a:bodyPr rtlCol="0" anchor="ctr"/>
+          <a:lstStyle/>
+          <a:p>
+            <a:pPr algn="ctr"/>
+          </a:p>
+        </p:txBody>
+      </p:sp>
+      <p:sp>
+        <p:nvSpPr>
+          <p:cNvPr id="72" name="Oval 71"/>
+          <p:cNvSpPr/>
+          <p:nvPr/>
+        </p:nvSpPr>
+        <p:spPr>
+          <a:xfrm>
+            <a:off x="11343132" y="2510027"/>
+            <a:ext cx="64008" cy="64008"/>
+          </a:xfrm>
+          <a:prstGeom prst="ellipse">
+            <a:avLst/>
+          </a:prstGeom>
+          <a:solidFill>
+            <a:srgbClr val="249653"/>
+          </a:solidFill>
+          <a:ln>
+            <a:solidFill>
+              <a:srgbClr val="249653"/>
+            </a:solidFill>
+          </a:ln>
+        </p:spPr>
+        <p:style>
+          <a:lnRef idx="1">
+            <a:schemeClr val="accent1"/>
+          </a:lnRef>
+          <a:fillRef idx="3">
+            <a:schemeClr val="accent1"/>
+          </a:fillRef>
+          <a:effectRef idx="2">
+            <a:schemeClr val="accent1"/>
+          </a:effectRef>
+          <a:fontRef idx="minor">
+            <a:schemeClr val="lt1"/>
+          </a:fontRef>
+        </p:style>
+        <p:txBody>
+          <a:bodyPr rtlCol="0" anchor="ctr"/>
+          <a:lstStyle/>
+          <a:p>
+            <a:pPr algn="ctr"/>
+          </a:p>
+        </p:txBody>
+      </p:sp>
+      <p:sp>
+        <p:nvSpPr>
+          <p:cNvPr id="73" name="Oval 72"/>
+          <p:cNvSpPr/>
+          <p:nvPr/>
+        </p:nvSpPr>
+        <p:spPr>
+          <a:xfrm>
+            <a:off x="11635740" y="2555748"/>
+            <a:ext cx="64008" cy="64008"/>
+          </a:xfrm>
+          <a:prstGeom prst="ellipse">
+            <a:avLst/>
+          </a:prstGeom>
+          <a:solidFill>
+            <a:srgbClr val="249653"/>
+          </a:solidFill>
+          <a:ln>
+            <a:solidFill>
+              <a:srgbClr val="249653"/>
+            </a:solidFill>
+          </a:ln>
+        </p:spPr>
+        <p:style>
+          <a:lnRef idx="1">
+            <a:schemeClr val="accent1"/>
+          </a:lnRef>
+          <a:fillRef idx="3">
+            <a:schemeClr val="accent1"/>
+          </a:fillRef>
+          <a:effectRef idx="2">
+            <a:schemeClr val="accent1"/>
+          </a:effectRef>
+          <a:fontRef idx="minor">
+            <a:schemeClr val="lt1"/>
+          </a:fontRef>
+        </p:style>
+        <p:txBody>
+          <a:bodyPr rtlCol="0" anchor="ctr"/>
+          <a:lstStyle/>
+          <a:p>
+            <a:pPr algn="ctr"/>
+          </a:p>
+        </p:txBody>
+      </p:sp>
+      <p:sp>
+        <p:nvSpPr>
+          <p:cNvPr id="74" name="TextBox 73"/>
+          <p:cNvSpPr txBox="1"/>
+          <p:nvPr/>
+        </p:nvSpPr>
+        <p:spPr>
+          <a:xfrm>
+            <a:off x="10213848" y="3227832"/>
+            <a:ext cx="1508760" cy="182880"/>
+          </a:xfrm>
+          <a:prstGeom prst="rect">
+            <a:avLst/>
+          </a:prstGeom>
+          <a:noFill/>
+        </p:spPr>
+        <p:txBody>
+          <a:bodyPr wrap="square" lIns="45720" rIns="45720" tIns="18288" bIns="18288" anchor="ctr">
+            <a:spAutoFit/>
+          </a:bodyPr>
+          <a:lstStyle/>
+          <a:p>
+            <a:pPr algn="ctr">
+              <a:spcAft>
+                <a:spcPts val="0"/>
+              </a:spcAft>
+            </a:pPr>
+            <a:r>
+              <a:rPr sz="800" b="0" i="1">
+                <a:solidFill>
+                  <a:srgbClr val="4D677F"/>
+                </a:solidFill>
+                <a:latin typeface="Aptos"/>
+              </a:rPr>
+              <a:t>Illustrative only</a:t>
+            </a:r>
+          </a:p>
+        </p:txBody>
+      </p:sp>
+      <p:sp>
+        <p:nvSpPr>
+          <p:cNvPr id="75" name="TextBox 74"/>
+          <p:cNvSpPr txBox="1"/>
+          <p:nvPr/>
+        </p:nvSpPr>
+        <p:spPr>
+          <a:xfrm>
+            <a:off x="8293608" y="3502152"/>
+            <a:ext cx="3557016" cy="246888"/>
+          </a:xfrm>
+          <a:prstGeom prst="rect">
+            <a:avLst/>
+          </a:prstGeom>
+          <a:noFill/>
+        </p:spPr>
+        <p:txBody>
+          <a:bodyPr wrap="square" lIns="45720" rIns="45720" tIns="18288" bIns="18288" anchor="ctr">
+            <a:spAutoFit/>
+          </a:bodyPr>
+          <a:lstStyle/>
+          <a:p>
+            <a:pPr algn="l">
+              <a:spcAft>
+                <a:spcPts val="0"/>
+              </a:spcAft>
+            </a:pPr>
+            <a:r>
+              <a:rPr sz="1500" b="1" i="0">
+                <a:solidFill>
+                  <a:srgbClr val="153964"/>
+                </a:solidFill>
+                <a:latin typeface="Aptos"/>
+              </a:rPr>
+              <a:t>What DoE Adds</a:t>
+            </a:r>
+          </a:p>
+        </p:txBody>
+      </p:sp>
+      <p:sp>
+        <p:nvSpPr>
+          <p:cNvPr id="76" name="Oval 75"/>
+          <p:cNvSpPr/>
+          <p:nvPr/>
+        </p:nvSpPr>
+        <p:spPr>
+          <a:xfrm>
+            <a:off x="8275320" y="3799332"/>
+            <a:ext cx="246888" cy="246888"/>
+          </a:xfrm>
+          <a:prstGeom prst="ellipse">
+            <a:avLst/>
+          </a:prstGeom>
+          <a:solidFill>
+            <a:srgbClr val="153964"/>
+          </a:solidFill>
+          <a:ln>
+            <a:solidFill>
+              <a:srgbClr val="153964"/>
+            </a:solidFill>
+          </a:ln>
+        </p:spPr>
+        <p:style>
+          <a:lnRef idx="1">
+            <a:schemeClr val="accent1"/>
+          </a:lnRef>
+          <a:fillRef idx="3">
+            <a:schemeClr val="accent1"/>
+          </a:fillRef>
+          <a:effectRef idx="2">
+            <a:schemeClr val="accent1"/>
+          </a:effectRef>
+          <a:fontRef idx="minor">
+            <a:schemeClr val="lt1"/>
+          </a:fontRef>
+        </p:style>
+        <p:txBody>
+          <a:bodyPr rtlCol="0" anchor="ctr"/>
+          <a:lstStyle/>
+          <a:p>
+            <a:pPr algn="ctr"/>
+          </a:p>
+        </p:txBody>
+      </p:sp>
+      <p:sp>
+        <p:nvSpPr>
+          <p:cNvPr id="77" name="TextBox 76"/>
+          <p:cNvSpPr txBox="1"/>
+          <p:nvPr/>
+        </p:nvSpPr>
+        <p:spPr>
+          <a:xfrm>
+            <a:off x="8275320" y="3794759"/>
+            <a:ext cx="246888" cy="246888"/>
+          </a:xfrm>
+          <a:prstGeom prst="rect">
+            <a:avLst/>
+          </a:prstGeom>
+          <a:noFill/>
+        </p:spPr>
+        <p:txBody>
+          <a:bodyPr wrap="square" lIns="0" rIns="0" tIns="18288" bIns="18288" anchor="ctr">
+            <a:spAutoFit/>
+          </a:bodyPr>
+          <a:lstStyle/>
+          <a:p>
+            <a:pPr algn="ctr">
+              <a:spcAft>
+                <a:spcPts val="0"/>
+              </a:spcAft>
+            </a:pPr>
+            <a:r>
+              <a:rPr sz="1000" b="1" i="0">
+                <a:solidFill>
+                  <a:srgbClr val="FFFFFF"/>
+                </a:solidFill>
+                <a:latin typeface="Aptos"/>
+              </a:rPr>
+              <a:t>1</a:t>
+            </a:r>
+          </a:p>
+        </p:txBody>
+      </p:sp>
+      <p:sp>
+        <p:nvSpPr>
+          <p:cNvPr id="78" name="TextBox 77"/>
+          <p:cNvSpPr txBox="1"/>
+          <p:nvPr/>
+        </p:nvSpPr>
+        <p:spPr>
+          <a:xfrm>
+            <a:off x="8595360" y="3776472"/>
+            <a:ext cx="3273552" cy="329184"/>
+          </a:xfrm>
+          <a:prstGeom prst="rect">
+            <a:avLst/>
+          </a:prstGeom>
+          <a:noFill/>
+        </p:spPr>
+        <p:txBody>
+          <a:bodyPr wrap="square" lIns="45720" rIns="45720" tIns="18288" bIns="18288" anchor="ctr">
+            <a:spAutoFit/>
+          </a:bodyPr>
+          <a:lstStyle/>
+          <a:p>
+            <a:pPr algn="l">
+              <a:spcAft>
+                <a:spcPts val="0"/>
+              </a:spcAft>
+            </a:pPr>
+            <a:r>
+              <a:rPr sz="1010" b="0" i="0">
+                <a:solidFill>
+                  <a:srgbClr val="183A5B"/>
+                </a:solidFill>
+                <a:latin typeface="Aptos"/>
+              </a:rPr>
+              <a:t>Selects factors and levels to investigate</a:t>
+            </a:r>
+          </a:p>
+        </p:txBody>
+      </p:sp>
+      <p:sp>
+        <p:nvSpPr>
+          <p:cNvPr id="79" name="Oval 78"/>
+          <p:cNvSpPr/>
+          <p:nvPr/>
+        </p:nvSpPr>
+        <p:spPr>
+          <a:xfrm>
+            <a:off x="8275320" y="4192524"/>
+            <a:ext cx="246888" cy="246888"/>
+          </a:xfrm>
+          <a:prstGeom prst="ellipse">
+            <a:avLst/>
+          </a:prstGeom>
+          <a:solidFill>
+            <a:srgbClr val="153964"/>
+          </a:solidFill>
+          <a:ln>
+            <a:solidFill>
+              <a:srgbClr val="153964"/>
+            </a:solidFill>
+          </a:ln>
+        </p:spPr>
+        <p:style>
+          <a:lnRef idx="1">
+            <a:schemeClr val="accent1"/>
+          </a:lnRef>
+          <a:fillRef idx="3">
+            <a:schemeClr val="accent1"/>
+          </a:fillRef>
+          <a:effectRef idx="2">
+            <a:schemeClr val="accent1"/>
+          </a:effectRef>
+          <a:fontRef idx="minor">
+            <a:schemeClr val="lt1"/>
+          </a:fontRef>
+        </p:style>
+        <p:txBody>
+          <a:bodyPr rtlCol="0" anchor="ctr"/>
+          <a:lstStyle/>
+          <a:p>
+            <a:pPr algn="ctr"/>
+          </a:p>
+        </p:txBody>
+      </p:sp>
+      <p:sp>
+        <p:nvSpPr>
+          <p:cNvPr id="80" name="TextBox 79"/>
+          <p:cNvSpPr txBox="1"/>
+          <p:nvPr/>
+        </p:nvSpPr>
+        <p:spPr>
+          <a:xfrm>
+            <a:off x="8275320" y="4187951"/>
+            <a:ext cx="246888" cy="246888"/>
+          </a:xfrm>
+          <a:prstGeom prst="rect">
+            <a:avLst/>
+          </a:prstGeom>
+          <a:noFill/>
+        </p:spPr>
+        <p:txBody>
+          <a:bodyPr wrap="square" lIns="0" rIns="0" tIns="18288" bIns="18288" anchor="ctr">
+            <a:spAutoFit/>
+          </a:bodyPr>
+          <a:lstStyle/>
+          <a:p>
+            <a:pPr algn="ctr">
+              <a:spcAft>
+                <a:spcPts val="0"/>
+              </a:spcAft>
+            </a:pPr>
+            <a:r>
+              <a:rPr sz="1000" b="1" i="0">
+                <a:solidFill>
+                  <a:srgbClr val="FFFFFF"/>
+                </a:solidFill>
+                <a:latin typeface="Aptos"/>
+              </a:rPr>
+              <a:t>2</a:t>
+            </a:r>
+          </a:p>
+        </p:txBody>
+      </p:sp>
+      <p:sp>
+        <p:nvSpPr>
+          <p:cNvPr id="81" name="TextBox 80"/>
+          <p:cNvSpPr txBox="1"/>
+          <p:nvPr/>
+        </p:nvSpPr>
+        <p:spPr>
+          <a:xfrm>
+            <a:off x="8595360" y="4169663"/>
+            <a:ext cx="3273552" cy="329184"/>
+          </a:xfrm>
+          <a:prstGeom prst="rect">
+            <a:avLst/>
+          </a:prstGeom>
+          <a:noFill/>
+        </p:spPr>
+        <p:txBody>
+          <a:bodyPr wrap="square" lIns="45720" rIns="45720" tIns="18288" bIns="18288" anchor="ctr">
+            <a:spAutoFit/>
+          </a:bodyPr>
+          <a:lstStyle/>
+          <a:p>
+            <a:pPr algn="l">
+              <a:spcAft>
+                <a:spcPts val="0"/>
+              </a:spcAft>
+            </a:pPr>
+            <a:r>
+              <a:rPr sz="1010" b="0" i="0">
+                <a:solidFill>
+                  <a:srgbClr val="183A5B"/>
+                </a:solidFill>
+                <a:latin typeface="Aptos"/>
+              </a:rPr>
+              <a:t>Chooses an efficient test design</a:t>
+            </a:r>
+          </a:p>
+        </p:txBody>
+      </p:sp>
+      <p:sp>
+        <p:nvSpPr>
+          <p:cNvPr id="82" name="Oval 81"/>
+          <p:cNvSpPr/>
+          <p:nvPr/>
+        </p:nvSpPr>
+        <p:spPr>
+          <a:xfrm>
+            <a:off x="8275320" y="4585716"/>
+            <a:ext cx="246888" cy="246888"/>
+          </a:xfrm>
+          <a:prstGeom prst="ellipse">
+            <a:avLst/>
+          </a:prstGeom>
+          <a:solidFill>
+            <a:srgbClr val="153964"/>
+          </a:solidFill>
+          <a:ln>
+            <a:solidFill>
+              <a:srgbClr val="153964"/>
+            </a:solidFill>
+          </a:ln>
+        </p:spPr>
+        <p:style>
+          <a:lnRef idx="1">
+            <a:schemeClr val="accent1"/>
+          </a:lnRef>
+          <a:fillRef idx="3">
+            <a:schemeClr val="accent1"/>
+          </a:fillRef>
+          <a:effectRef idx="2">
+            <a:schemeClr val="accent1"/>
+          </a:effectRef>
+          <a:fontRef idx="minor">
+            <a:schemeClr val="lt1"/>
+          </a:fontRef>
+        </p:style>
+        <p:txBody>
+          <a:bodyPr rtlCol="0" anchor="ctr"/>
+          <a:lstStyle/>
+          <a:p>
+            <a:pPr algn="ctr"/>
+          </a:p>
+        </p:txBody>
+      </p:sp>
+      <p:sp>
+        <p:nvSpPr>
+          <p:cNvPr id="83" name="TextBox 82"/>
+          <p:cNvSpPr txBox="1"/>
+          <p:nvPr/>
+        </p:nvSpPr>
+        <p:spPr>
+          <a:xfrm>
+            <a:off x="8275320" y="4581143"/>
+            <a:ext cx="246888" cy="246888"/>
+          </a:xfrm>
+          <a:prstGeom prst="rect">
+            <a:avLst/>
+          </a:prstGeom>
+          <a:noFill/>
+        </p:spPr>
+        <p:txBody>
+          <a:bodyPr wrap="square" lIns="0" rIns="0" tIns="18288" bIns="18288" anchor="ctr">
+            <a:spAutoFit/>
+          </a:bodyPr>
+          <a:lstStyle/>
+          <a:p>
+            <a:pPr algn="ctr">
+              <a:spcAft>
+                <a:spcPts val="0"/>
+              </a:spcAft>
+            </a:pPr>
+            <a:r>
+              <a:rPr sz="1000" b="1" i="0">
+                <a:solidFill>
+                  <a:srgbClr val="FFFFFF"/>
+                </a:solidFill>
+                <a:latin typeface="Aptos"/>
+              </a:rPr>
+              <a:t>3</a:t>
+            </a:r>
+          </a:p>
+        </p:txBody>
+      </p:sp>
+      <p:sp>
+        <p:nvSpPr>
+          <p:cNvPr id="84" name="TextBox 83"/>
+          <p:cNvSpPr txBox="1"/>
+          <p:nvPr/>
+        </p:nvSpPr>
+        <p:spPr>
+          <a:xfrm>
+            <a:off x="8595360" y="4562855"/>
+            <a:ext cx="3273552" cy="329184"/>
+          </a:xfrm>
+          <a:prstGeom prst="rect">
+            <a:avLst/>
+          </a:prstGeom>
+          <a:noFill/>
+        </p:spPr>
+        <p:txBody>
+          <a:bodyPr wrap="square" lIns="45720" rIns="45720" tIns="18288" bIns="18288" anchor="ctr">
+            <a:spAutoFit/>
+          </a:bodyPr>
+          <a:lstStyle/>
+          <a:p>
+            <a:pPr algn="l">
+              <a:spcAft>
+                <a:spcPts val="0"/>
+              </a:spcAft>
+            </a:pPr>
+            <a:r>
+              <a:rPr sz="1010" b="0" i="0">
+                <a:solidFill>
+                  <a:srgbClr val="183A5B"/>
+                </a:solidFill>
+                <a:latin typeface="Aptos"/>
+              </a:rPr>
+              <a:t>Controls or records experimental conditions</a:t>
+            </a:r>
+          </a:p>
+        </p:txBody>
+      </p:sp>
+      <p:sp>
+        <p:nvSpPr>
+          <p:cNvPr id="85" name="Oval 84"/>
+          <p:cNvSpPr/>
+          <p:nvPr/>
+        </p:nvSpPr>
+        <p:spPr>
+          <a:xfrm>
+            <a:off x="8275320" y="4978907"/>
+            <a:ext cx="246888" cy="246888"/>
+          </a:xfrm>
+          <a:prstGeom prst="ellipse">
+            <a:avLst/>
+          </a:prstGeom>
+          <a:solidFill>
+            <a:srgbClr val="153964"/>
+          </a:solidFill>
+          <a:ln>
+            <a:solidFill>
+              <a:srgbClr val="153964"/>
+            </a:solidFill>
+          </a:ln>
+        </p:spPr>
+        <p:style>
+          <a:lnRef idx="1">
+            <a:schemeClr val="accent1"/>
+          </a:lnRef>
+          <a:fillRef idx="3">
+            <a:schemeClr val="accent1"/>
+          </a:fillRef>
+          <a:effectRef idx="2">
+            <a:schemeClr val="accent1"/>
+          </a:effectRef>
+          <a:fontRef idx="minor">
+            <a:schemeClr val="lt1"/>
+          </a:fontRef>
+        </p:style>
+        <p:txBody>
+          <a:bodyPr rtlCol="0" anchor="ctr"/>
+          <a:lstStyle/>
+          <a:p>
+            <a:pPr algn="ctr"/>
+          </a:p>
+        </p:txBody>
+      </p:sp>
+      <p:sp>
+        <p:nvSpPr>
+          <p:cNvPr id="86" name="TextBox 85"/>
+          <p:cNvSpPr txBox="1"/>
+          <p:nvPr/>
+        </p:nvSpPr>
+        <p:spPr>
+          <a:xfrm>
+            <a:off x="8275320" y="4974335"/>
+            <a:ext cx="246888" cy="246888"/>
+          </a:xfrm>
+          <a:prstGeom prst="rect">
+            <a:avLst/>
+          </a:prstGeom>
+          <a:noFill/>
+        </p:spPr>
+        <p:txBody>
+          <a:bodyPr wrap="square" lIns="0" rIns="0" tIns="18288" bIns="18288" anchor="ctr">
+            <a:spAutoFit/>
+          </a:bodyPr>
+          <a:lstStyle/>
+          <a:p>
+            <a:pPr algn="ctr">
+              <a:spcAft>
+                <a:spcPts val="0"/>
+              </a:spcAft>
+            </a:pPr>
+            <a:r>
+              <a:rPr sz="1000" b="1" i="0">
+                <a:solidFill>
+                  <a:srgbClr val="FFFFFF"/>
+                </a:solidFill>
+                <a:latin typeface="Aptos"/>
+              </a:rPr>
+              <a:t>4</a:t>
+            </a:r>
+          </a:p>
+        </p:txBody>
+      </p:sp>
+      <p:sp>
+        <p:nvSpPr>
+          <p:cNvPr id="87" name="TextBox 86"/>
+          <p:cNvSpPr txBox="1"/>
+          <p:nvPr/>
+        </p:nvSpPr>
+        <p:spPr>
+          <a:xfrm>
+            <a:off x="8595360" y="4956047"/>
+            <a:ext cx="3273552" cy="329184"/>
+          </a:xfrm>
+          <a:prstGeom prst="rect">
+            <a:avLst/>
+          </a:prstGeom>
+          <a:noFill/>
+        </p:spPr>
+        <p:txBody>
+          <a:bodyPr wrap="square" lIns="45720" rIns="45720" tIns="18288" bIns="18288" anchor="ctr">
+            <a:spAutoFit/>
+          </a:bodyPr>
+          <a:lstStyle/>
+          <a:p>
+            <a:pPr algn="l">
+              <a:spcAft>
+                <a:spcPts val="0"/>
+              </a:spcAft>
+            </a:pPr>
+            <a:r>
+              <a:rPr sz="1010" b="0" i="0">
+                <a:solidFill>
+                  <a:srgbClr val="183A5B"/>
+                </a:solidFill>
+                <a:latin typeface="Aptos"/>
+              </a:rPr>
+              <a:t>Analyzes effects, interactions, and uncertainty</a:t>
+            </a:r>
+          </a:p>
+        </p:txBody>
+      </p:sp>
+      <p:sp>
+        <p:nvSpPr>
+          <p:cNvPr id="88" name="Oval 87"/>
+          <p:cNvSpPr/>
+          <p:nvPr/>
+        </p:nvSpPr>
+        <p:spPr>
+          <a:xfrm>
+            <a:off x="8275320" y="5372099"/>
+            <a:ext cx="246888" cy="246888"/>
+          </a:xfrm>
+          <a:prstGeom prst="ellipse">
+            <a:avLst/>
+          </a:prstGeom>
+          <a:solidFill>
+            <a:srgbClr val="153964"/>
+          </a:solidFill>
+          <a:ln>
+            <a:solidFill>
+              <a:srgbClr val="153964"/>
+            </a:solidFill>
+          </a:ln>
+        </p:spPr>
+        <p:style>
+          <a:lnRef idx="1">
+            <a:schemeClr val="accent1"/>
+          </a:lnRef>
+          <a:fillRef idx="3">
+            <a:schemeClr val="accent1"/>
+          </a:fillRef>
+          <a:effectRef idx="2">
+            <a:schemeClr val="accent1"/>
+          </a:effectRef>
+          <a:fontRef idx="minor">
+            <a:schemeClr val="lt1"/>
+          </a:fontRef>
+        </p:style>
+        <p:txBody>
+          <a:bodyPr rtlCol="0" anchor="ctr"/>
+          <a:lstStyle/>
+          <a:p>
+            <a:pPr algn="ctr"/>
+          </a:p>
+        </p:txBody>
+      </p:sp>
+      <p:sp>
+        <p:nvSpPr>
+          <p:cNvPr id="89" name="TextBox 88"/>
+          <p:cNvSpPr txBox="1"/>
+          <p:nvPr/>
+        </p:nvSpPr>
+        <p:spPr>
+          <a:xfrm>
+            <a:off x="8275320" y="5367527"/>
+            <a:ext cx="246888" cy="246888"/>
+          </a:xfrm>
+          <a:prstGeom prst="rect">
+            <a:avLst/>
+          </a:prstGeom>
+          <a:noFill/>
+        </p:spPr>
+        <p:txBody>
+          <a:bodyPr wrap="square" lIns="0" rIns="0" tIns="18288" bIns="18288" anchor="ctr">
+            <a:spAutoFit/>
+          </a:bodyPr>
+          <a:lstStyle/>
+          <a:p>
+            <a:pPr algn="ctr">
+              <a:spcAft>
+                <a:spcPts val="0"/>
+              </a:spcAft>
+            </a:pPr>
+            <a:r>
+              <a:rPr sz="1000" b="1" i="0">
+                <a:solidFill>
+                  <a:srgbClr val="FFFFFF"/>
+                </a:solidFill>
+                <a:latin typeface="Aptos"/>
+              </a:rPr>
+              <a:t>5</a:t>
+            </a:r>
+          </a:p>
+        </p:txBody>
+      </p:sp>
+      <p:sp>
+        <p:nvSpPr>
+          <p:cNvPr id="90" name="TextBox 89"/>
+          <p:cNvSpPr txBox="1"/>
+          <p:nvPr/>
+        </p:nvSpPr>
+        <p:spPr>
+          <a:xfrm>
+            <a:off x="8595360" y="5349239"/>
+            <a:ext cx="3273552" cy="329184"/>
+          </a:xfrm>
+          <a:prstGeom prst="rect">
+            <a:avLst/>
+          </a:prstGeom>
+          <a:noFill/>
+        </p:spPr>
+        <p:txBody>
+          <a:bodyPr wrap="square" lIns="45720" rIns="45720" tIns="18288" bIns="18288" anchor="ctr">
+            <a:spAutoFit/>
+          </a:bodyPr>
+          <a:lstStyle/>
+          <a:p>
+            <a:pPr algn="l">
+              <a:spcAft>
+                <a:spcPts val="0"/>
+              </a:spcAft>
+            </a:pPr>
+            <a:r>
+              <a:rPr sz="1010" b="0" i="0">
+                <a:solidFill>
+                  <a:srgbClr val="183A5B"/>
+                </a:solidFill>
+                <a:latin typeface="Aptos"/>
+              </a:rPr>
+              <a:t>Quantifies confidence in conclusions</a:t>
+            </a:r>
+          </a:p>
+        </p:txBody>
+      </p:sp>
+      <p:sp>
+        <p:nvSpPr>
+          <p:cNvPr id="91" name="Rounded Rectangle 90"/>
+          <p:cNvSpPr/>
+          <p:nvPr/>
+        </p:nvSpPr>
+        <p:spPr>
+          <a:xfrm>
+            <a:off x="164592" y="6108192"/>
+            <a:ext cx="11859768" cy="585216"/>
+          </a:xfrm>
+          <a:prstGeom prst="roundRect">
+            <a:avLst>
+              <a:gd name="adj" fmla="val 8000"/>
+            </a:avLst>
+          </a:prstGeom>
+          <a:solidFill>
+            <a:srgbClr val="153964"/>
+          </a:solidFill>
+          <a:ln>
+            <a:solidFill>
+              <a:srgbClr val="153964"/>
+            </a:solidFill>
+          </a:ln>
+        </p:spPr>
+        <p:style>
+          <a:lnRef idx="1">
+            <a:schemeClr val="accent1"/>
+          </a:lnRef>
+          <a:fillRef idx="3">
+            <a:schemeClr val="accent1"/>
+          </a:fillRef>
+          <a:effectRef idx="2">
+            <a:schemeClr val="accent1"/>
+          </a:effectRef>
+          <a:fontRef idx="minor">
+            <a:schemeClr val="lt1"/>
+          </a:fontRef>
+        </p:style>
+        <p:txBody>
+          <a:bodyPr rtlCol="0" anchor="ctr"/>
+          <a:lstStyle/>
+          <a:p>
+            <a:pPr algn="ctr"/>
+          </a:p>
+        </p:txBody>
+      </p:sp>
+      <p:sp>
+        <p:nvSpPr>
+          <p:cNvPr id="92" name="TextBox 91"/>
+          <p:cNvSpPr txBox="1"/>
+          <p:nvPr/>
+        </p:nvSpPr>
+        <p:spPr>
+          <a:xfrm>
+            <a:off x="384048" y="6181344"/>
+            <a:ext cx="1463040" cy="384048"/>
+          </a:xfrm>
+          <a:prstGeom prst="rect">
+            <a:avLst/>
+          </a:prstGeom>
+          <a:noFill/>
+        </p:spPr>
+        <p:txBody>
+          <a:bodyPr wrap="square" lIns="45720" rIns="45720" tIns="18288" bIns="18288" anchor="ctr">
+            <a:spAutoFit/>
+          </a:bodyPr>
+          <a:lstStyle/>
+          <a:p>
+            <a:pPr algn="ctr">
+              <a:spcAft>
+                <a:spcPts val="0"/>
+              </a:spcAft>
+            </a:pPr>
+            <a:r>
+              <a:rPr sz="1700" b="1" i="0">
+                <a:solidFill>
+                  <a:srgbClr val="FFFFFF"/>
+                </a:solidFill>
+                <a:latin typeface="Aptos"/>
+              </a:rPr>
+              <a:t>BOTTOM LINE</a:t>
+            </a:r>
+          </a:p>
+        </p:txBody>
+      </p:sp>
+      <p:sp>
+        <p:nvSpPr>
+          <p:cNvPr id="93" name="TextBox 92"/>
+          <p:cNvSpPr txBox="1"/>
+          <p:nvPr/>
+        </p:nvSpPr>
+        <p:spPr>
+          <a:xfrm>
+            <a:off x="1920240" y="6144768"/>
+            <a:ext cx="9784080" cy="310896"/>
+          </a:xfrm>
+          <a:prstGeom prst="rect">
+            <a:avLst/>
+          </a:prstGeom>
+          <a:noFill/>
+        </p:spPr>
+        <p:txBody>
+          <a:bodyPr wrap="square" lIns="45720" rIns="45720" tIns="18288" bIns="18288" anchor="ctr">
+            <a:spAutoFit/>
+          </a:bodyPr>
+          <a:lstStyle/>
+          <a:p>
+            <a:pPr algn="l">
+              <a:spcAft>
+                <a:spcPts val="0"/>
+              </a:spcAft>
+            </a:pPr>
+            <a:r>
+              <a:rPr sz="1200" b="1" i="0">
+                <a:solidFill>
+                  <a:srgbClr val="FFFFFF"/>
+                </a:solidFill>
+                <a:latin typeface="Aptos"/>
+              </a:rPr>
+              <a:t>Project Farm is a practical illustration of experimental thinking: compare options, measure outcomes, and decide from evidence.</a:t>
+            </a:r>
+          </a:p>
+        </p:txBody>
+      </p:sp>
+      <p:sp>
+        <p:nvSpPr>
+          <p:cNvPr id="94" name="TextBox 93"/>
+          <p:cNvSpPr txBox="1"/>
+          <p:nvPr/>
+        </p:nvSpPr>
+        <p:spPr>
+          <a:xfrm>
+            <a:off x="1920240" y="6428232"/>
+            <a:ext cx="9784080" cy="182880"/>
+          </a:xfrm>
+          <a:prstGeom prst="rect">
+            <a:avLst/>
+          </a:prstGeom>
+          <a:noFill/>
+        </p:spPr>
+        <p:txBody>
+          <a:bodyPr wrap="square" lIns="45720" rIns="45720" tIns="18288" bIns="18288" anchor="ctr">
+            <a:spAutoFit/>
+          </a:bodyPr>
+          <a:lstStyle/>
+          <a:p>
+            <a:pPr algn="l">
+              <a:spcAft>
+                <a:spcPts val="0"/>
+              </a:spcAft>
+            </a:pPr>
+            <a:r>
+              <a:rPr sz="1050" b="0" i="1">
+                <a:solidFill>
+                  <a:srgbClr val="FFFFFF"/>
+                </a:solidFill>
+                <a:latin typeface="Aptos"/>
+              </a:rPr>
+              <a:t>Different tools. Same principles. Better decisions.</a:t>
+            </a:r>
+          </a:p>
+        </p:txBody>
+      </p:sp>
     </p:spTree>
   </p:cSld>
   <p:clrMapOvr>
